--- a/Slides/Analyzers.Net.pptx
+++ b/Slides/Analyzers.Net.pptx
@@ -3918,8 +3918,45 @@
                 <a:cs typeface="Consolas"/>
               </a:rPr>
               <a:t>
-name.Trim();</a:t>
-            </a:r>
+</a:t>
+            </a:r>
+            <a:r>
+              <a:rPr lang="en-US" sz="1400">
+                <a:solidFill>
+                  <a:srgbClr val="1F1F1F"/>
+                </a:solidFill>
+                <a:latin typeface="Consolas"/>
+                <a:cs typeface="Consolas"/>
+              </a:rPr>
+              <a:t>name.</a:t>
+            </a:r>
+            <a:r>
+              <a:rPr lang="en-US" sz="1400">
+                <a:solidFill>
+                  <a:srgbClr val="74531F"/>
+                </a:solidFill>
+                <a:latin typeface="Consolas"/>
+                <a:cs typeface="Consolas"/>
+              </a:rPr>
+              <a:t>Trim</a:t>
+            </a:r>
+            <a:r>
+              <a:rPr lang="en-US" sz="1400">
+                <a:solidFill>
+                  <a:srgbClr val="1F1F1F"/>
+                </a:solidFill>
+                <a:latin typeface="Consolas"/>
+                <a:cs typeface="Consolas"/>
+              </a:rPr>
+              <a:t>();</a:t>
+            </a:r>
+            <a:endParaRPr lang="en-US" sz="1400">
+              <a:solidFill>
+                <a:srgbClr val="1F3A5F"/>
+              </a:solidFill>
+              <a:latin typeface="Consolas"/>
+              <a:cs typeface="Consolas"/>
+            </a:endParaRPr>
           </a:p>
         </p:txBody>
       </p:sp>
@@ -4017,8 +4054,45 @@
                 <a:cs typeface="Consolas"/>
               </a:rPr>
               <a:t>
-name = name.Trim();</a:t>
-            </a:r>
+</a:t>
+            </a:r>
+            <a:r>
+              <a:rPr lang="en-US" sz="1400">
+                <a:solidFill>
+                  <a:srgbClr val="1F1F1F"/>
+                </a:solidFill>
+                <a:latin typeface="Consolas"/>
+                <a:cs typeface="Consolas"/>
+              </a:rPr>
+              <a:t>name = name.</a:t>
+            </a:r>
+            <a:r>
+              <a:rPr lang="en-US" sz="1400">
+                <a:solidFill>
+                  <a:srgbClr val="74531F"/>
+                </a:solidFill>
+                <a:latin typeface="Consolas"/>
+                <a:cs typeface="Consolas"/>
+              </a:rPr>
+              <a:t>Trim</a:t>
+            </a:r>
+            <a:r>
+              <a:rPr lang="en-US" sz="1400">
+                <a:solidFill>
+                  <a:srgbClr val="1F1F1F"/>
+                </a:solidFill>
+                <a:latin typeface="Consolas"/>
+                <a:cs typeface="Consolas"/>
+              </a:rPr>
+              <a:t>();</a:t>
+            </a:r>
+            <a:endParaRPr lang="en-US" sz="1400">
+              <a:solidFill>
+                <a:srgbClr val="1F3A5F"/>
+              </a:solidFill>
+              <a:latin typeface="Consolas"/>
+              <a:cs typeface="Consolas"/>
+            </a:endParaRPr>
           </a:p>
         </p:txBody>
       </p:sp>
@@ -4283,8 +4357,175 @@
                 <a:cs typeface="Consolas"/>
               </a:rPr>
               <a:t>
-public class Order { public int Id; public string Name; }</a:t>
-            </a:r>
+</a:t>
+            </a:r>
+            <a:r>
+              <a:rPr lang="en-US" sz="1400">
+                <a:solidFill>
+                  <a:srgbClr val="0000FF"/>
+                </a:solidFill>
+                <a:latin typeface="Consolas"/>
+                <a:cs typeface="Consolas"/>
+              </a:rPr>
+              <a:t>public</a:t>
+            </a:r>
+            <a:r>
+              <a:rPr lang="en-US" sz="1400">
+                <a:solidFill>
+                  <a:srgbClr val="1F1F1F"/>
+                </a:solidFill>
+                <a:latin typeface="Consolas"/>
+                <a:cs typeface="Consolas"/>
+              </a:rPr>
+              <a:t> </a:t>
+            </a:r>
+            <a:r>
+              <a:rPr lang="en-US" sz="1400">
+                <a:solidFill>
+                  <a:srgbClr val="0000FF"/>
+                </a:solidFill>
+                <a:latin typeface="Consolas"/>
+                <a:cs typeface="Consolas"/>
+              </a:rPr>
+              <a:t>class</a:t>
+            </a:r>
+            <a:r>
+              <a:rPr lang="en-US" sz="1400">
+                <a:solidFill>
+                  <a:srgbClr val="1F1F1F"/>
+                </a:solidFill>
+                <a:latin typeface="Consolas"/>
+                <a:cs typeface="Consolas"/>
+              </a:rPr>
+              <a:t> </a:t>
+            </a:r>
+            <a:r>
+              <a:rPr lang="en-US" sz="1400">
+                <a:solidFill>
+                  <a:srgbClr val="2B91AF"/>
+                </a:solidFill>
+                <a:latin typeface="Consolas"/>
+                <a:cs typeface="Consolas"/>
+              </a:rPr>
+              <a:t>Order</a:t>
+            </a:r>
+            <a:r>
+              <a:rPr lang="en-US" sz="1400">
+                <a:solidFill>
+                  <a:srgbClr val="1F1F1F"/>
+                </a:solidFill>
+                <a:latin typeface="Consolas"/>
+                <a:cs typeface="Consolas"/>
+              </a:rPr>
+              <a:t> { </a:t>
+            </a:r>
+            <a:r>
+              <a:rPr lang="en-US" sz="1400">
+                <a:solidFill>
+                  <a:srgbClr val="0000FF"/>
+                </a:solidFill>
+                <a:latin typeface="Consolas"/>
+                <a:cs typeface="Consolas"/>
+              </a:rPr>
+              <a:t>public</a:t>
+            </a:r>
+            <a:r>
+              <a:rPr lang="en-US" sz="1400">
+                <a:solidFill>
+                  <a:srgbClr val="1F1F1F"/>
+                </a:solidFill>
+                <a:latin typeface="Consolas"/>
+                <a:cs typeface="Consolas"/>
+              </a:rPr>
+              <a:t> </a:t>
+            </a:r>
+            <a:r>
+              <a:rPr lang="en-US" sz="1400">
+                <a:solidFill>
+                  <a:srgbClr val="0000FF"/>
+                </a:solidFill>
+                <a:latin typeface="Consolas"/>
+                <a:cs typeface="Consolas"/>
+              </a:rPr>
+              <a:t>int</a:t>
+            </a:r>
+            <a:r>
+              <a:rPr lang="en-US" sz="1400">
+                <a:solidFill>
+                  <a:srgbClr val="1F1F1F"/>
+                </a:solidFill>
+                <a:latin typeface="Consolas"/>
+                <a:cs typeface="Consolas"/>
+              </a:rPr>
+              <a:t> </a:t>
+            </a:r>
+            <a:r>
+              <a:rPr lang="en-US" sz="1400">
+                <a:solidFill>
+                  <a:srgbClr val="2B91AF"/>
+                </a:solidFill>
+                <a:latin typeface="Consolas"/>
+                <a:cs typeface="Consolas"/>
+              </a:rPr>
+              <a:t>Id</a:t>
+            </a:r>
+            <a:r>
+              <a:rPr lang="en-US" sz="1400">
+                <a:solidFill>
+                  <a:srgbClr val="1F1F1F"/>
+                </a:solidFill>
+                <a:latin typeface="Consolas"/>
+                <a:cs typeface="Consolas"/>
+              </a:rPr>
+              <a:t>; </a:t>
+            </a:r>
+            <a:r>
+              <a:rPr lang="en-US" sz="1400">
+                <a:solidFill>
+                  <a:srgbClr val="0000FF"/>
+                </a:solidFill>
+                <a:latin typeface="Consolas"/>
+                <a:cs typeface="Consolas"/>
+              </a:rPr>
+              <a:t>public</a:t>
+            </a:r>
+            <a:r>
+              <a:rPr lang="en-US" sz="1400">
+                <a:solidFill>
+                  <a:srgbClr val="1F1F1F"/>
+                </a:solidFill>
+                <a:latin typeface="Consolas"/>
+                <a:cs typeface="Consolas"/>
+              </a:rPr>
+              <a:t> </a:t>
+            </a:r>
+            <a:r>
+              <a:rPr lang="en-US" sz="1400">
+                <a:solidFill>
+                  <a:srgbClr val="0000FF"/>
+                </a:solidFill>
+                <a:latin typeface="Consolas"/>
+                <a:cs typeface="Consolas"/>
+              </a:rPr>
+              <a:t>string</a:t>
+            </a:r>
+            <a:r>
+              <a:rPr lang="en-US" sz="1400">
+                <a:solidFill>
+                  <a:srgbClr val="1F1F1F"/>
+                </a:solidFill>
+                <a:latin typeface="Consolas"/>
+                <a:cs typeface="Consolas"/>
+              </a:rPr>
+              <a:t> Name; }</a:t>
+            </a:r>
+            <a:endParaRPr lang="en-US" sz="1400">
+              <a:solidFill>
+                <a:srgbClr val="1F3A5F"/>
+              </a:solidFill>
+              <a:latin typeface="Consolas"/>
+              <a:cs typeface="Consolas"/>
+            </a:endParaRPr>
           </a:p>
         </p:txBody>
       </p:sp>
@@ -4382,9 +4623,226 @@
                 <a:cs typeface="Consolas"/>
               </a:rPr>
               <a:t>
-[DebuggerDisplay("{Id}: {Name}")]
-public class Order { public int Id; public string Name; }</a:t>
-            </a:r>
+</a:t>
+            </a:r>
+            <a:r>
+              <a:rPr lang="en-US" sz="1400">
+                <a:solidFill>
+                  <a:srgbClr val="1F1F1F"/>
+                </a:solidFill>
+                <a:latin typeface="Consolas"/>
+                <a:cs typeface="Consolas"/>
+              </a:rPr>
+              <a:t>[</a:t>
+            </a:r>
+            <a:r>
+              <a:rPr lang="en-US" sz="1400">
+                <a:solidFill>
+                  <a:srgbClr val="2B91AF"/>
+                </a:solidFill>
+                <a:latin typeface="Consolas"/>
+                <a:cs typeface="Consolas"/>
+              </a:rPr>
+              <a:t>DebuggerDisplay</a:t>
+            </a:r>
+            <a:r>
+              <a:rPr lang="en-US" sz="1400">
+                <a:solidFill>
+                  <a:srgbClr val="1F1F1F"/>
+                </a:solidFill>
+                <a:latin typeface="Consolas"/>
+                <a:cs typeface="Consolas"/>
+              </a:rPr>
+              <a:t>(</a:t>
+            </a:r>
+            <a:r>
+              <a:rPr lang="en-US" sz="1400">
+                <a:solidFill>
+                  <a:srgbClr val="A31515"/>
+                </a:solidFill>
+                <a:latin typeface="Consolas"/>
+                <a:cs typeface="Consolas"/>
+              </a:rPr>
+              <a:t>"{Id}: {Name}"</a:t>
+            </a:r>
+            <a:r>
+              <a:rPr lang="en-US" sz="1400">
+                <a:solidFill>
+                  <a:srgbClr val="1F1F1F"/>
+                </a:solidFill>
+                <a:latin typeface="Consolas"/>
+                <a:cs typeface="Consolas"/>
+              </a:rPr>
+              <a:t>)]
+</a:t>
+            </a:r>
+            <a:r>
+              <a:rPr lang="en-US" sz="1400">
+                <a:solidFill>
+                  <a:srgbClr val="0000FF"/>
+                </a:solidFill>
+                <a:latin typeface="Consolas"/>
+                <a:cs typeface="Consolas"/>
+              </a:rPr>
+              <a:t>public</a:t>
+            </a:r>
+            <a:r>
+              <a:rPr lang="en-US" sz="1400">
+                <a:solidFill>
+                  <a:srgbClr val="1F1F1F"/>
+                </a:solidFill>
+                <a:latin typeface="Consolas"/>
+                <a:cs typeface="Consolas"/>
+              </a:rPr>
+              <a:t> </a:t>
+            </a:r>
+            <a:r>
+              <a:rPr lang="en-US" sz="1400">
+                <a:solidFill>
+                  <a:srgbClr val="0000FF"/>
+                </a:solidFill>
+                <a:latin typeface="Consolas"/>
+                <a:cs typeface="Consolas"/>
+              </a:rPr>
+              <a:t>class</a:t>
+            </a:r>
+            <a:r>
+              <a:rPr lang="en-US" sz="1400">
+                <a:solidFill>
+                  <a:srgbClr val="1F1F1F"/>
+                </a:solidFill>
+                <a:latin typeface="Consolas"/>
+                <a:cs typeface="Consolas"/>
+              </a:rPr>
+              <a:t> </a:t>
+            </a:r>
+            <a:r>
+              <a:rPr lang="en-US" sz="1400">
+                <a:solidFill>
+                  <a:srgbClr val="2B91AF"/>
+                </a:solidFill>
+                <a:latin typeface="Consolas"/>
+                <a:cs typeface="Consolas"/>
+              </a:rPr>
+              <a:t>Order</a:t>
+            </a:r>
+            <a:r>
+              <a:rPr lang="en-US" sz="1400">
+                <a:solidFill>
+                  <a:srgbClr val="1F1F1F"/>
+                </a:solidFill>
+                <a:latin typeface="Consolas"/>
+                <a:cs typeface="Consolas"/>
+              </a:rPr>
+              <a:t> { </a:t>
+            </a:r>
+            <a:r>
+              <a:rPr lang="en-US" sz="1400">
+                <a:solidFill>
+                  <a:srgbClr val="0000FF"/>
+                </a:solidFill>
+                <a:latin typeface="Consolas"/>
+                <a:cs typeface="Consolas"/>
+              </a:rPr>
+              <a:t>public</a:t>
+            </a:r>
+            <a:r>
+              <a:rPr lang="en-US" sz="1400">
+                <a:solidFill>
+                  <a:srgbClr val="1F1F1F"/>
+                </a:solidFill>
+                <a:latin typeface="Consolas"/>
+                <a:cs typeface="Consolas"/>
+              </a:rPr>
+              <a:t> </a:t>
+            </a:r>
+            <a:r>
+              <a:rPr lang="en-US" sz="1400">
+                <a:solidFill>
+                  <a:srgbClr val="0000FF"/>
+                </a:solidFill>
+                <a:latin typeface="Consolas"/>
+                <a:cs typeface="Consolas"/>
+              </a:rPr>
+              <a:t>int</a:t>
+            </a:r>
+            <a:r>
+              <a:rPr lang="en-US" sz="1400">
+                <a:solidFill>
+                  <a:srgbClr val="1F1F1F"/>
+                </a:solidFill>
+                <a:latin typeface="Consolas"/>
+                <a:cs typeface="Consolas"/>
+              </a:rPr>
+              <a:t> </a:t>
+            </a:r>
+            <a:r>
+              <a:rPr lang="en-US" sz="1400">
+                <a:solidFill>
+                  <a:srgbClr val="2B91AF"/>
+                </a:solidFill>
+                <a:latin typeface="Consolas"/>
+                <a:cs typeface="Consolas"/>
+              </a:rPr>
+              <a:t>Id</a:t>
+            </a:r>
+            <a:r>
+              <a:rPr lang="en-US" sz="1400">
+                <a:solidFill>
+                  <a:srgbClr val="1F1F1F"/>
+                </a:solidFill>
+                <a:latin typeface="Consolas"/>
+                <a:cs typeface="Consolas"/>
+              </a:rPr>
+              <a:t>; </a:t>
+            </a:r>
+            <a:r>
+              <a:rPr lang="en-US" sz="1400">
+                <a:solidFill>
+                  <a:srgbClr val="0000FF"/>
+                </a:solidFill>
+                <a:latin typeface="Consolas"/>
+                <a:cs typeface="Consolas"/>
+              </a:rPr>
+              <a:t>public</a:t>
+            </a:r>
+            <a:r>
+              <a:rPr lang="en-US" sz="1400">
+                <a:solidFill>
+                  <a:srgbClr val="1F1F1F"/>
+                </a:solidFill>
+                <a:latin typeface="Consolas"/>
+                <a:cs typeface="Consolas"/>
+              </a:rPr>
+              <a:t> </a:t>
+            </a:r>
+            <a:r>
+              <a:rPr lang="en-US" sz="1400">
+                <a:solidFill>
+                  <a:srgbClr val="0000FF"/>
+                </a:solidFill>
+                <a:latin typeface="Consolas"/>
+                <a:cs typeface="Consolas"/>
+              </a:rPr>
+              <a:t>string</a:t>
+            </a:r>
+            <a:r>
+              <a:rPr lang="en-US" sz="1400">
+                <a:solidFill>
+                  <a:srgbClr val="1F1F1F"/>
+                </a:solidFill>
+                <a:latin typeface="Consolas"/>
+                <a:cs typeface="Consolas"/>
+              </a:rPr>
+              <a:t> Name; }</a:t>
+            </a:r>
+            <a:endParaRPr lang="en-US" sz="1400">
+              <a:solidFill>
+                <a:srgbClr val="1F3A5F"/>
+              </a:solidFill>
+              <a:latin typeface="Consolas"/>
+              <a:cs typeface="Consolas"/>
+            </a:endParaRPr>
           </a:p>
         </p:txBody>
       </p:sp>
@@ -4649,8 +5107,115 @@
                 <a:cs typeface="Consolas"/>
               </a:rPr>
               <a:t>
-public int Add(int a, int b) =&gt; a + b;</a:t>
-            </a:r>
+</a:t>
+            </a:r>
+            <a:r>
+              <a:rPr lang="en-US" sz="1400">
+                <a:solidFill>
+                  <a:srgbClr val="0000FF"/>
+                </a:solidFill>
+                <a:latin typeface="Consolas"/>
+                <a:cs typeface="Consolas"/>
+              </a:rPr>
+              <a:t>public</a:t>
+            </a:r>
+            <a:r>
+              <a:rPr lang="en-US" sz="1400">
+                <a:solidFill>
+                  <a:srgbClr val="1F1F1F"/>
+                </a:solidFill>
+                <a:latin typeface="Consolas"/>
+                <a:cs typeface="Consolas"/>
+              </a:rPr>
+              <a:t> </a:t>
+            </a:r>
+            <a:r>
+              <a:rPr lang="en-US" sz="1400">
+                <a:solidFill>
+                  <a:srgbClr val="0000FF"/>
+                </a:solidFill>
+                <a:latin typeface="Consolas"/>
+                <a:cs typeface="Consolas"/>
+              </a:rPr>
+              <a:t>int</a:t>
+            </a:r>
+            <a:r>
+              <a:rPr lang="en-US" sz="1400">
+                <a:solidFill>
+                  <a:srgbClr val="1F1F1F"/>
+                </a:solidFill>
+                <a:latin typeface="Consolas"/>
+                <a:cs typeface="Consolas"/>
+              </a:rPr>
+              <a:t> </a:t>
+            </a:r>
+            <a:r>
+              <a:rPr lang="en-US" sz="1400">
+                <a:solidFill>
+                  <a:srgbClr val="74531F"/>
+                </a:solidFill>
+                <a:latin typeface="Consolas"/>
+                <a:cs typeface="Consolas"/>
+              </a:rPr>
+              <a:t>Add</a:t>
+            </a:r>
+            <a:r>
+              <a:rPr lang="en-US" sz="1400">
+                <a:solidFill>
+                  <a:srgbClr val="1F1F1F"/>
+                </a:solidFill>
+                <a:latin typeface="Consolas"/>
+                <a:cs typeface="Consolas"/>
+              </a:rPr>
+              <a:t>(</a:t>
+            </a:r>
+            <a:r>
+              <a:rPr lang="en-US" sz="1400">
+                <a:solidFill>
+                  <a:srgbClr val="0000FF"/>
+                </a:solidFill>
+                <a:latin typeface="Consolas"/>
+                <a:cs typeface="Consolas"/>
+              </a:rPr>
+              <a:t>int</a:t>
+            </a:r>
+            <a:r>
+              <a:rPr lang="en-US" sz="1400">
+                <a:solidFill>
+                  <a:srgbClr val="1F1F1F"/>
+                </a:solidFill>
+                <a:latin typeface="Consolas"/>
+                <a:cs typeface="Consolas"/>
+              </a:rPr>
+              <a:t> a, </a:t>
+            </a:r>
+            <a:r>
+              <a:rPr lang="en-US" sz="1400">
+                <a:solidFill>
+                  <a:srgbClr val="0000FF"/>
+                </a:solidFill>
+                <a:latin typeface="Consolas"/>
+                <a:cs typeface="Consolas"/>
+              </a:rPr>
+              <a:t>int</a:t>
+            </a:r>
+            <a:r>
+              <a:rPr lang="en-US" sz="1400">
+                <a:solidFill>
+                  <a:srgbClr val="1F1F1F"/>
+                </a:solidFill>
+                <a:latin typeface="Consolas"/>
+                <a:cs typeface="Consolas"/>
+              </a:rPr>
+              <a:t> b) =&gt; a + b;</a:t>
+            </a:r>
+            <a:endParaRPr lang="en-US" sz="1400">
+              <a:solidFill>
+                <a:srgbClr val="1F3A5F"/>
+              </a:solidFill>
+              <a:latin typeface="Consolas"/>
+              <a:cs typeface="Consolas"/>
+            </a:endParaRPr>
           </a:p>
         </p:txBody>
       </p:sp>
@@ -4748,8 +5313,135 @@
                 <a:cs typeface="Consolas"/>
               </a:rPr>
               <a:t>
-public static int Add(int a, int b) =&gt; a + b;</a:t>
-            </a:r>
+</a:t>
+            </a:r>
+            <a:r>
+              <a:rPr lang="en-US" sz="1400">
+                <a:solidFill>
+                  <a:srgbClr val="0000FF"/>
+                </a:solidFill>
+                <a:latin typeface="Consolas"/>
+                <a:cs typeface="Consolas"/>
+              </a:rPr>
+              <a:t>public</a:t>
+            </a:r>
+            <a:r>
+              <a:rPr lang="en-US" sz="1400">
+                <a:solidFill>
+                  <a:srgbClr val="1F1F1F"/>
+                </a:solidFill>
+                <a:latin typeface="Consolas"/>
+                <a:cs typeface="Consolas"/>
+              </a:rPr>
+              <a:t> </a:t>
+            </a:r>
+            <a:r>
+              <a:rPr lang="en-US" sz="1400">
+                <a:solidFill>
+                  <a:srgbClr val="0000FF"/>
+                </a:solidFill>
+                <a:latin typeface="Consolas"/>
+                <a:cs typeface="Consolas"/>
+              </a:rPr>
+              <a:t>static</a:t>
+            </a:r>
+            <a:r>
+              <a:rPr lang="en-US" sz="1400">
+                <a:solidFill>
+                  <a:srgbClr val="1F1F1F"/>
+                </a:solidFill>
+                <a:latin typeface="Consolas"/>
+                <a:cs typeface="Consolas"/>
+              </a:rPr>
+              <a:t> </a:t>
+            </a:r>
+            <a:r>
+              <a:rPr lang="en-US" sz="1400">
+                <a:solidFill>
+                  <a:srgbClr val="0000FF"/>
+                </a:solidFill>
+                <a:latin typeface="Consolas"/>
+                <a:cs typeface="Consolas"/>
+              </a:rPr>
+              <a:t>int</a:t>
+            </a:r>
+            <a:r>
+              <a:rPr lang="en-US" sz="1400">
+                <a:solidFill>
+                  <a:srgbClr val="1F1F1F"/>
+                </a:solidFill>
+                <a:latin typeface="Consolas"/>
+                <a:cs typeface="Consolas"/>
+              </a:rPr>
+              <a:t> </a:t>
+            </a:r>
+            <a:r>
+              <a:rPr lang="en-US" sz="1400">
+                <a:solidFill>
+                  <a:srgbClr val="74531F"/>
+                </a:solidFill>
+                <a:latin typeface="Consolas"/>
+                <a:cs typeface="Consolas"/>
+              </a:rPr>
+              <a:t>Add</a:t>
+            </a:r>
+            <a:r>
+              <a:rPr lang="en-US" sz="1400">
+                <a:solidFill>
+                  <a:srgbClr val="1F1F1F"/>
+                </a:solidFill>
+                <a:latin typeface="Consolas"/>
+                <a:cs typeface="Consolas"/>
+              </a:rPr>
+              <a:t>(</a:t>
+            </a:r>
+            <a:r>
+              <a:rPr lang="en-US" sz="1400">
+                <a:solidFill>
+                  <a:srgbClr val="0000FF"/>
+                </a:solidFill>
+                <a:latin typeface="Consolas"/>
+                <a:cs typeface="Consolas"/>
+              </a:rPr>
+              <a:t>int</a:t>
+            </a:r>
+            <a:r>
+              <a:rPr lang="en-US" sz="1400">
+                <a:solidFill>
+                  <a:srgbClr val="1F1F1F"/>
+                </a:solidFill>
+                <a:latin typeface="Consolas"/>
+                <a:cs typeface="Consolas"/>
+              </a:rPr>
+              <a:t> a, </a:t>
+            </a:r>
+            <a:r>
+              <a:rPr lang="en-US" sz="1400">
+                <a:solidFill>
+                  <a:srgbClr val="0000FF"/>
+                </a:solidFill>
+                <a:latin typeface="Consolas"/>
+                <a:cs typeface="Consolas"/>
+              </a:rPr>
+              <a:t>int</a:t>
+            </a:r>
+            <a:r>
+              <a:rPr lang="en-US" sz="1400">
+                <a:solidFill>
+                  <a:srgbClr val="1F1F1F"/>
+                </a:solidFill>
+                <a:latin typeface="Consolas"/>
+                <a:cs typeface="Consolas"/>
+              </a:rPr>
+              <a:t> b) =&gt; a + b;</a:t>
+            </a:r>
+            <a:endParaRPr lang="en-US" sz="1400">
+              <a:solidFill>
+                <a:srgbClr val="1F3A5F"/>
+              </a:solidFill>
+              <a:latin typeface="Consolas"/>
+              <a:cs typeface="Consolas"/>
+            </a:endParaRPr>
           </a:p>
         </p:txBody>
       </p:sp>
@@ -5014,8 +5706,135 @@
                 <a:cs typeface="Consolas"/>
               </a:rPr>
               <a:t>
-async Task Run() { Thread.Sleep(1000); }</a:t>
-            </a:r>
+</a:t>
+            </a:r>
+            <a:r>
+              <a:rPr lang="en-US" sz="1400">
+                <a:solidFill>
+                  <a:srgbClr val="0000FF"/>
+                </a:solidFill>
+                <a:latin typeface="Consolas"/>
+                <a:cs typeface="Consolas"/>
+              </a:rPr>
+              <a:t>async</a:t>
+            </a:r>
+            <a:r>
+              <a:rPr lang="en-US" sz="1400">
+                <a:solidFill>
+                  <a:srgbClr val="1F1F1F"/>
+                </a:solidFill>
+                <a:latin typeface="Consolas"/>
+                <a:cs typeface="Consolas"/>
+              </a:rPr>
+              <a:t> </a:t>
+            </a:r>
+            <a:r>
+              <a:rPr lang="en-US" sz="1400">
+                <a:solidFill>
+                  <a:srgbClr val="2B91AF"/>
+                </a:solidFill>
+                <a:latin typeface="Consolas"/>
+                <a:cs typeface="Consolas"/>
+              </a:rPr>
+              <a:t>Task</a:t>
+            </a:r>
+            <a:r>
+              <a:rPr lang="en-US" sz="1400">
+                <a:solidFill>
+                  <a:srgbClr val="1F1F1F"/>
+                </a:solidFill>
+                <a:latin typeface="Consolas"/>
+                <a:cs typeface="Consolas"/>
+              </a:rPr>
+              <a:t> </a:t>
+            </a:r>
+            <a:r>
+              <a:rPr lang="en-US" sz="1400">
+                <a:solidFill>
+                  <a:srgbClr val="74531F"/>
+                </a:solidFill>
+                <a:latin typeface="Consolas"/>
+                <a:cs typeface="Consolas"/>
+              </a:rPr>
+              <a:t>Run</a:t>
+            </a:r>
+            <a:r>
+              <a:rPr lang="en-US" sz="1400">
+                <a:solidFill>
+                  <a:srgbClr val="1F1F1F"/>
+                </a:solidFill>
+                <a:latin typeface="Consolas"/>
+                <a:cs typeface="Consolas"/>
+              </a:rPr>
+              <a:t>() { </a:t>
+            </a:r>
+            <a:r>
+              <a:rPr lang="en-US" sz="1400">
+                <a:solidFill>
+                  <a:srgbClr val="2B91AF"/>
+                </a:solidFill>
+                <a:latin typeface="Consolas"/>
+                <a:cs typeface="Consolas"/>
+              </a:rPr>
+              <a:t>Thread</a:t>
+            </a:r>
+            <a:r>
+              <a:rPr lang="en-US" sz="1400">
+                <a:solidFill>
+                  <a:srgbClr val="1F1F1F"/>
+                </a:solidFill>
+                <a:latin typeface="Consolas"/>
+                <a:cs typeface="Consolas"/>
+              </a:rPr>
+              <a:t>.</a:t>
+            </a:r>
+            <a:r>
+              <a:rPr lang="en-US" sz="1400">
+                <a:solidFill>
+                  <a:srgbClr val="74531F"/>
+                </a:solidFill>
+                <a:latin typeface="Consolas"/>
+                <a:cs typeface="Consolas"/>
+              </a:rPr>
+              <a:t>Sleep</a:t>
+            </a:r>
+            <a:r>
+              <a:rPr lang="en-US" sz="1400">
+                <a:solidFill>
+                  <a:srgbClr val="1F1F1F"/>
+                </a:solidFill>
+                <a:latin typeface="Consolas"/>
+                <a:cs typeface="Consolas"/>
+              </a:rPr>
+              <a:t>(</a:t>
+            </a:r>
+            <a:r>
+              <a:rPr lang="en-US" sz="1400">
+                <a:solidFill>
+                  <a:srgbClr val="098658"/>
+                </a:solidFill>
+                <a:latin typeface="Consolas"/>
+                <a:cs typeface="Consolas"/>
+              </a:rPr>
+              <a:t>1000</a:t>
+            </a:r>
+            <a:r>
+              <a:rPr lang="en-US" sz="1400">
+                <a:solidFill>
+                  <a:srgbClr val="1F1F1F"/>
+                </a:solidFill>
+                <a:latin typeface="Consolas"/>
+                <a:cs typeface="Consolas"/>
+              </a:rPr>
+              <a:t>); }</a:t>
+            </a:r>
+            <a:endParaRPr lang="en-US" sz="1400">
+              <a:solidFill>
+                <a:srgbClr val="1F3A5F"/>
+              </a:solidFill>
+              <a:latin typeface="Consolas"/>
+              <a:cs typeface="Consolas"/>
+            </a:endParaRPr>
           </a:p>
         </p:txBody>
       </p:sp>
@@ -5113,8 +5932,155 @@
                 <a:cs typeface="Consolas"/>
               </a:rPr>
               <a:t>
-async Task Run() { await Task.Delay(1000); }</a:t>
-            </a:r>
+</a:t>
+            </a:r>
+            <a:r>
+              <a:rPr lang="en-US" sz="1400">
+                <a:solidFill>
+                  <a:srgbClr val="0000FF"/>
+                </a:solidFill>
+                <a:latin typeface="Consolas"/>
+                <a:cs typeface="Consolas"/>
+              </a:rPr>
+              <a:t>async</a:t>
+            </a:r>
+            <a:r>
+              <a:rPr lang="en-US" sz="1400">
+                <a:solidFill>
+                  <a:srgbClr val="1F1F1F"/>
+                </a:solidFill>
+                <a:latin typeface="Consolas"/>
+                <a:cs typeface="Consolas"/>
+              </a:rPr>
+              <a:t> </a:t>
+            </a:r>
+            <a:r>
+              <a:rPr lang="en-US" sz="1400">
+                <a:solidFill>
+                  <a:srgbClr val="2B91AF"/>
+                </a:solidFill>
+                <a:latin typeface="Consolas"/>
+                <a:cs typeface="Consolas"/>
+              </a:rPr>
+              <a:t>Task</a:t>
+            </a:r>
+            <a:r>
+              <a:rPr lang="en-US" sz="1400">
+                <a:solidFill>
+                  <a:srgbClr val="1F1F1F"/>
+                </a:solidFill>
+                <a:latin typeface="Consolas"/>
+                <a:cs typeface="Consolas"/>
+              </a:rPr>
+              <a:t> </a:t>
+            </a:r>
+            <a:r>
+              <a:rPr lang="en-US" sz="1400">
+                <a:solidFill>
+                  <a:srgbClr val="74531F"/>
+                </a:solidFill>
+                <a:latin typeface="Consolas"/>
+                <a:cs typeface="Consolas"/>
+              </a:rPr>
+              <a:t>Run</a:t>
+            </a:r>
+            <a:r>
+              <a:rPr lang="en-US" sz="1400">
+                <a:solidFill>
+                  <a:srgbClr val="1F1F1F"/>
+                </a:solidFill>
+                <a:latin typeface="Consolas"/>
+                <a:cs typeface="Consolas"/>
+              </a:rPr>
+              <a:t>() { </a:t>
+            </a:r>
+            <a:r>
+              <a:rPr lang="en-US" sz="1400">
+                <a:solidFill>
+                  <a:srgbClr val="8F08C4"/>
+                </a:solidFill>
+                <a:latin typeface="Consolas"/>
+                <a:cs typeface="Consolas"/>
+              </a:rPr>
+              <a:t>await</a:t>
+            </a:r>
+            <a:r>
+              <a:rPr lang="en-US" sz="1400">
+                <a:solidFill>
+                  <a:srgbClr val="1F1F1F"/>
+                </a:solidFill>
+                <a:latin typeface="Consolas"/>
+                <a:cs typeface="Consolas"/>
+              </a:rPr>
+              <a:t> </a:t>
+            </a:r>
+            <a:r>
+              <a:rPr lang="en-US" sz="1400">
+                <a:solidFill>
+                  <a:srgbClr val="2B91AF"/>
+                </a:solidFill>
+                <a:latin typeface="Consolas"/>
+                <a:cs typeface="Consolas"/>
+              </a:rPr>
+              <a:t>Task</a:t>
+            </a:r>
+            <a:r>
+              <a:rPr lang="en-US" sz="1400">
+                <a:solidFill>
+                  <a:srgbClr val="1F1F1F"/>
+                </a:solidFill>
+                <a:latin typeface="Consolas"/>
+                <a:cs typeface="Consolas"/>
+              </a:rPr>
+              <a:t>.</a:t>
+            </a:r>
+            <a:r>
+              <a:rPr lang="en-US" sz="1400">
+                <a:solidFill>
+                  <a:srgbClr val="74531F"/>
+                </a:solidFill>
+                <a:latin typeface="Consolas"/>
+                <a:cs typeface="Consolas"/>
+              </a:rPr>
+              <a:t>Delay</a:t>
+            </a:r>
+            <a:r>
+              <a:rPr lang="en-US" sz="1400">
+                <a:solidFill>
+                  <a:srgbClr val="1F1F1F"/>
+                </a:solidFill>
+                <a:latin typeface="Consolas"/>
+                <a:cs typeface="Consolas"/>
+              </a:rPr>
+              <a:t>(</a:t>
+            </a:r>
+            <a:r>
+              <a:rPr lang="en-US" sz="1400">
+                <a:solidFill>
+                  <a:srgbClr val="098658"/>
+                </a:solidFill>
+                <a:latin typeface="Consolas"/>
+                <a:cs typeface="Consolas"/>
+              </a:rPr>
+              <a:t>1000</a:t>
+            </a:r>
+            <a:r>
+              <a:rPr lang="en-US" sz="1400">
+                <a:solidFill>
+                  <a:srgbClr val="1F1F1F"/>
+                </a:solidFill>
+                <a:latin typeface="Consolas"/>
+                <a:cs typeface="Consolas"/>
+              </a:rPr>
+              <a:t>); }</a:t>
+            </a:r>
+            <a:endParaRPr lang="en-US" sz="1400">
+              <a:solidFill>
+                <a:srgbClr val="1F3A5F"/>
+              </a:solidFill>
+              <a:latin typeface="Consolas"/>
+              <a:cs typeface="Consolas"/>
+            </a:endParaRPr>
           </a:p>
         </p:txBody>
       </p:sp>
@@ -5379,8 +6345,75 @@
                 <a:cs typeface="Consolas"/>
               </a:rPr>
               <a:t>
-var stream = File.OpenRead(path);</a:t>
-            </a:r>
+</a:t>
+            </a:r>
+            <a:r>
+              <a:rPr lang="en-US" sz="1400">
+                <a:solidFill>
+                  <a:srgbClr val="0000FF"/>
+                </a:solidFill>
+                <a:latin typeface="Consolas"/>
+                <a:cs typeface="Consolas"/>
+              </a:rPr>
+              <a:t>var</a:t>
+            </a:r>
+            <a:r>
+              <a:rPr lang="en-US" sz="1400">
+                <a:solidFill>
+                  <a:srgbClr val="1F1F1F"/>
+                </a:solidFill>
+                <a:latin typeface="Consolas"/>
+                <a:cs typeface="Consolas"/>
+              </a:rPr>
+              <a:t> stream = </a:t>
+            </a:r>
+            <a:r>
+              <a:rPr lang="en-US" sz="1400">
+                <a:solidFill>
+                  <a:srgbClr val="2B91AF"/>
+                </a:solidFill>
+                <a:latin typeface="Consolas"/>
+                <a:cs typeface="Consolas"/>
+              </a:rPr>
+              <a:t>File</a:t>
+            </a:r>
+            <a:r>
+              <a:rPr lang="en-US" sz="1400">
+                <a:solidFill>
+                  <a:srgbClr val="1F1F1F"/>
+                </a:solidFill>
+                <a:latin typeface="Consolas"/>
+                <a:cs typeface="Consolas"/>
+              </a:rPr>
+              <a:t>.</a:t>
+            </a:r>
+            <a:r>
+              <a:rPr lang="en-US" sz="1400">
+                <a:solidFill>
+                  <a:srgbClr val="74531F"/>
+                </a:solidFill>
+                <a:latin typeface="Consolas"/>
+                <a:cs typeface="Consolas"/>
+              </a:rPr>
+              <a:t>OpenRead</a:t>
+            </a:r>
+            <a:r>
+              <a:rPr lang="en-US" sz="1400">
+                <a:solidFill>
+                  <a:srgbClr val="1F1F1F"/>
+                </a:solidFill>
+                <a:latin typeface="Consolas"/>
+                <a:cs typeface="Consolas"/>
+              </a:rPr>
+              <a:t>(path);</a:t>
+            </a:r>
+            <a:endParaRPr lang="en-US" sz="1400">
+              <a:solidFill>
+                <a:srgbClr val="1F3A5F"/>
+              </a:solidFill>
+              <a:latin typeface="Consolas"/>
+              <a:cs typeface="Consolas"/>
+            </a:endParaRPr>
           </a:p>
         </p:txBody>
       </p:sp>
@@ -5478,8 +6511,95 @@
                 <a:cs typeface="Consolas"/>
               </a:rPr>
               <a:t>
-using var stream = File.OpenRead(path);</a:t>
-            </a:r>
+</a:t>
+            </a:r>
+            <a:r>
+              <a:rPr lang="en-US" sz="1400">
+                <a:solidFill>
+                  <a:srgbClr val="0000FF"/>
+                </a:solidFill>
+                <a:latin typeface="Consolas"/>
+                <a:cs typeface="Consolas"/>
+              </a:rPr>
+              <a:t>using</a:t>
+            </a:r>
+            <a:r>
+              <a:rPr lang="en-US" sz="1400">
+                <a:solidFill>
+                  <a:srgbClr val="1F1F1F"/>
+                </a:solidFill>
+                <a:latin typeface="Consolas"/>
+                <a:cs typeface="Consolas"/>
+              </a:rPr>
+              <a:t> </a:t>
+            </a:r>
+            <a:r>
+              <a:rPr lang="en-US" sz="1400">
+                <a:solidFill>
+                  <a:srgbClr val="0000FF"/>
+                </a:solidFill>
+                <a:latin typeface="Consolas"/>
+                <a:cs typeface="Consolas"/>
+              </a:rPr>
+              <a:t>var</a:t>
+            </a:r>
+            <a:r>
+              <a:rPr lang="en-US" sz="1400">
+                <a:solidFill>
+                  <a:srgbClr val="1F1F1F"/>
+                </a:solidFill>
+                <a:latin typeface="Consolas"/>
+                <a:cs typeface="Consolas"/>
+              </a:rPr>
+              <a:t> stream = </a:t>
+            </a:r>
+            <a:r>
+              <a:rPr lang="en-US" sz="1400">
+                <a:solidFill>
+                  <a:srgbClr val="2B91AF"/>
+                </a:solidFill>
+                <a:latin typeface="Consolas"/>
+                <a:cs typeface="Consolas"/>
+              </a:rPr>
+              <a:t>File</a:t>
+            </a:r>
+            <a:r>
+              <a:rPr lang="en-US" sz="1400">
+                <a:solidFill>
+                  <a:srgbClr val="1F1F1F"/>
+                </a:solidFill>
+                <a:latin typeface="Consolas"/>
+                <a:cs typeface="Consolas"/>
+              </a:rPr>
+              <a:t>.</a:t>
+            </a:r>
+            <a:r>
+              <a:rPr lang="en-US" sz="1400">
+                <a:solidFill>
+                  <a:srgbClr val="74531F"/>
+                </a:solidFill>
+                <a:latin typeface="Consolas"/>
+                <a:cs typeface="Consolas"/>
+              </a:rPr>
+              <a:t>OpenRead</a:t>
+            </a:r>
+            <a:r>
+              <a:rPr lang="en-US" sz="1400">
+                <a:solidFill>
+                  <a:srgbClr val="1F1F1F"/>
+                </a:solidFill>
+                <a:latin typeface="Consolas"/>
+                <a:cs typeface="Consolas"/>
+              </a:rPr>
+              <a:t>(path);</a:t>
+            </a:r>
+            <a:endParaRPr lang="en-US" sz="1400">
+              <a:solidFill>
+                <a:srgbClr val="1F3A5F"/>
+              </a:solidFill>
+              <a:latin typeface="Consolas"/>
+              <a:cs typeface="Consolas"/>
+            </a:endParaRPr>
           </a:p>
         </p:txBody>
       </p:sp>
@@ -5744,8 +6864,55 @@
                 <a:cs typeface="Consolas"/>
               </a:rPr>
               <a:t>
-var password = "hunter2";</a:t>
-            </a:r>
+</a:t>
+            </a:r>
+            <a:r>
+              <a:rPr lang="en-US" sz="1400">
+                <a:solidFill>
+                  <a:srgbClr val="0000FF"/>
+                </a:solidFill>
+                <a:latin typeface="Consolas"/>
+                <a:cs typeface="Consolas"/>
+              </a:rPr>
+              <a:t>var</a:t>
+            </a:r>
+            <a:r>
+              <a:rPr lang="en-US" sz="1400">
+                <a:solidFill>
+                  <a:srgbClr val="1F1F1F"/>
+                </a:solidFill>
+                <a:latin typeface="Consolas"/>
+                <a:cs typeface="Consolas"/>
+              </a:rPr>
+              <a:t> password = </a:t>
+            </a:r>
+            <a:r>
+              <a:rPr lang="en-US" sz="1400">
+                <a:solidFill>
+                  <a:srgbClr val="A31515"/>
+                </a:solidFill>
+                <a:latin typeface="Consolas"/>
+                <a:cs typeface="Consolas"/>
+              </a:rPr>
+              <a:t>"hunter2"</a:t>
+            </a:r>
+            <a:r>
+              <a:rPr lang="en-US" sz="1400">
+                <a:solidFill>
+                  <a:srgbClr val="1F1F1F"/>
+                </a:solidFill>
+                <a:latin typeface="Consolas"/>
+                <a:cs typeface="Consolas"/>
+              </a:rPr>
+              <a:t>;</a:t>
+            </a:r>
+            <a:endParaRPr lang="en-US" sz="1400">
+              <a:solidFill>
+                <a:srgbClr val="1F3A5F"/>
+              </a:solidFill>
+              <a:latin typeface="Consolas"/>
+              <a:cs typeface="Consolas"/>
+            </a:endParaRPr>
           </a:p>
         </p:txBody>
       </p:sp>
@@ -5843,8 +7010,55 @@
                 <a:cs typeface="Consolas"/>
               </a:rPr>
               <a:t>
-var password = config["Db:Password"];</a:t>
-            </a:r>
+</a:t>
+            </a:r>
+            <a:r>
+              <a:rPr lang="en-US" sz="1400">
+                <a:solidFill>
+                  <a:srgbClr val="0000FF"/>
+                </a:solidFill>
+                <a:latin typeface="Consolas"/>
+                <a:cs typeface="Consolas"/>
+              </a:rPr>
+              <a:t>var</a:t>
+            </a:r>
+            <a:r>
+              <a:rPr lang="en-US" sz="1400">
+                <a:solidFill>
+                  <a:srgbClr val="1F1F1F"/>
+                </a:solidFill>
+                <a:latin typeface="Consolas"/>
+                <a:cs typeface="Consolas"/>
+              </a:rPr>
+              <a:t> password = config[</a:t>
+            </a:r>
+            <a:r>
+              <a:rPr lang="en-US" sz="1400">
+                <a:solidFill>
+                  <a:srgbClr val="A31515"/>
+                </a:solidFill>
+                <a:latin typeface="Consolas"/>
+                <a:cs typeface="Consolas"/>
+              </a:rPr>
+              <a:t>"Db:Password"</a:t>
+            </a:r>
+            <a:r>
+              <a:rPr lang="en-US" sz="1400">
+                <a:solidFill>
+                  <a:srgbClr val="1F1F1F"/>
+                </a:solidFill>
+                <a:latin typeface="Consolas"/>
+                <a:cs typeface="Consolas"/>
+              </a:rPr>
+              <a:t>];</a:t>
+            </a:r>
+            <a:endParaRPr lang="en-US" sz="1400">
+              <a:solidFill>
+                <a:srgbClr val="1F3A5F"/>
+              </a:solidFill>
+              <a:latin typeface="Consolas"/>
+              <a:cs typeface="Consolas"/>
+            </a:endParaRPr>
           </a:p>
         </p:txBody>
       </p:sp>
@@ -6109,8 +7323,75 @@
                 <a:cs typeface="Consolas"/>
               </a:rPr>
               <a:t>
-new SqlCommand("SELECT * FROM Users WHERE Id=" + id, conn);</a:t>
-            </a:r>
+</a:t>
+            </a:r>
+            <a:r>
+              <a:rPr lang="en-US" sz="1400">
+                <a:solidFill>
+                  <a:srgbClr val="0000FF"/>
+                </a:solidFill>
+                <a:latin typeface="Consolas"/>
+                <a:cs typeface="Consolas"/>
+              </a:rPr>
+              <a:t>new</a:t>
+            </a:r>
+            <a:r>
+              <a:rPr lang="en-US" sz="1400">
+                <a:solidFill>
+                  <a:srgbClr val="1F1F1F"/>
+                </a:solidFill>
+                <a:latin typeface="Consolas"/>
+                <a:cs typeface="Consolas"/>
+              </a:rPr>
+              <a:t> </a:t>
+            </a:r>
+            <a:r>
+              <a:rPr lang="en-US" sz="1400">
+                <a:solidFill>
+                  <a:srgbClr val="2B91AF"/>
+                </a:solidFill>
+                <a:latin typeface="Consolas"/>
+                <a:cs typeface="Consolas"/>
+              </a:rPr>
+              <a:t>SqlCommand</a:t>
+            </a:r>
+            <a:r>
+              <a:rPr lang="en-US" sz="1400">
+                <a:solidFill>
+                  <a:srgbClr val="1F1F1F"/>
+                </a:solidFill>
+                <a:latin typeface="Consolas"/>
+                <a:cs typeface="Consolas"/>
+              </a:rPr>
+              <a:t>(</a:t>
+            </a:r>
+            <a:r>
+              <a:rPr lang="en-US" sz="1400">
+                <a:solidFill>
+                  <a:srgbClr val="A31515"/>
+                </a:solidFill>
+                <a:latin typeface="Consolas"/>
+                <a:cs typeface="Consolas"/>
+              </a:rPr>
+              <a:t>"SELECT * FROM Users WHERE Id="</a:t>
+            </a:r>
+            <a:r>
+              <a:rPr lang="en-US" sz="1400">
+                <a:solidFill>
+                  <a:srgbClr val="1F1F1F"/>
+                </a:solidFill>
+                <a:latin typeface="Consolas"/>
+                <a:cs typeface="Consolas"/>
+              </a:rPr>
+              <a:t> + id, conn);</a:t>
+            </a:r>
+            <a:endParaRPr lang="en-US" sz="1400">
+              <a:solidFill>
+                <a:srgbClr val="1F3A5F"/>
+              </a:solidFill>
+              <a:latin typeface="Consolas"/>
+              <a:cs typeface="Consolas"/>
+            </a:endParaRPr>
           </a:p>
         </p:txBody>
       </p:sp>
@@ -6208,9 +7489,136 @@
                 <a:cs typeface="Consolas"/>
               </a:rPr>
               <a:t>
-var cmd = new SqlCommand("SELECT * FROM Users WHERE Id=@id", conn);
-cmd.Parameters.AddWithValue("@id", id);</a:t>
-            </a:r>
+</a:t>
+            </a:r>
+            <a:r>
+              <a:rPr lang="en-US" sz="1400">
+                <a:solidFill>
+                  <a:srgbClr val="0000FF"/>
+                </a:solidFill>
+                <a:latin typeface="Consolas"/>
+                <a:cs typeface="Consolas"/>
+              </a:rPr>
+              <a:t>var</a:t>
+            </a:r>
+            <a:r>
+              <a:rPr lang="en-US" sz="1400">
+                <a:solidFill>
+                  <a:srgbClr val="1F1F1F"/>
+                </a:solidFill>
+                <a:latin typeface="Consolas"/>
+                <a:cs typeface="Consolas"/>
+              </a:rPr>
+              <a:t> cmd = </a:t>
+            </a:r>
+            <a:r>
+              <a:rPr lang="en-US" sz="1400">
+                <a:solidFill>
+                  <a:srgbClr val="0000FF"/>
+                </a:solidFill>
+                <a:latin typeface="Consolas"/>
+                <a:cs typeface="Consolas"/>
+              </a:rPr>
+              <a:t>new</a:t>
+            </a:r>
+            <a:r>
+              <a:rPr lang="en-US" sz="1400">
+                <a:solidFill>
+                  <a:srgbClr val="1F1F1F"/>
+                </a:solidFill>
+                <a:latin typeface="Consolas"/>
+                <a:cs typeface="Consolas"/>
+              </a:rPr>
+              <a:t> </a:t>
+            </a:r>
+            <a:r>
+              <a:rPr lang="en-US" sz="1400">
+                <a:solidFill>
+                  <a:srgbClr val="2B91AF"/>
+                </a:solidFill>
+                <a:latin typeface="Consolas"/>
+                <a:cs typeface="Consolas"/>
+              </a:rPr>
+              <a:t>SqlCommand</a:t>
+            </a:r>
+            <a:r>
+              <a:rPr lang="en-US" sz="1400">
+                <a:solidFill>
+                  <a:srgbClr val="1F1F1F"/>
+                </a:solidFill>
+                <a:latin typeface="Consolas"/>
+                <a:cs typeface="Consolas"/>
+              </a:rPr>
+              <a:t>(</a:t>
+            </a:r>
+            <a:r>
+              <a:rPr lang="en-US" sz="1400">
+                <a:solidFill>
+                  <a:srgbClr val="A31515"/>
+                </a:solidFill>
+                <a:latin typeface="Consolas"/>
+                <a:cs typeface="Consolas"/>
+              </a:rPr>
+              <a:t>"SELECT * FROM Users WHERE Id=@id"</a:t>
+            </a:r>
+            <a:r>
+              <a:rPr lang="en-US" sz="1400">
+                <a:solidFill>
+                  <a:srgbClr val="1F1F1F"/>
+                </a:solidFill>
+                <a:latin typeface="Consolas"/>
+                <a:cs typeface="Consolas"/>
+              </a:rPr>
+              <a:t>, conn);
+cmd.Parameters.</a:t>
+            </a:r>
+            <a:r>
+              <a:rPr lang="en-US" sz="1400">
+                <a:solidFill>
+                  <a:srgbClr val="74531F"/>
+                </a:solidFill>
+                <a:latin typeface="Consolas"/>
+                <a:cs typeface="Consolas"/>
+              </a:rPr>
+              <a:t>AddWithValue</a:t>
+            </a:r>
+            <a:r>
+              <a:rPr lang="en-US" sz="1400">
+                <a:solidFill>
+                  <a:srgbClr val="1F1F1F"/>
+                </a:solidFill>
+                <a:latin typeface="Consolas"/>
+                <a:cs typeface="Consolas"/>
+              </a:rPr>
+              <a:t>(</a:t>
+            </a:r>
+            <a:r>
+              <a:rPr lang="en-US" sz="1400">
+                <a:solidFill>
+                  <a:srgbClr val="A31515"/>
+                </a:solidFill>
+                <a:latin typeface="Consolas"/>
+                <a:cs typeface="Consolas"/>
+              </a:rPr>
+              <a:t>"@id"</a:t>
+            </a:r>
+            <a:r>
+              <a:rPr lang="en-US" sz="1400">
+                <a:solidFill>
+                  <a:srgbClr val="1F1F1F"/>
+                </a:solidFill>
+                <a:latin typeface="Consolas"/>
+                <a:cs typeface="Consolas"/>
+              </a:rPr>
+              <a:t>, id);</a:t>
+            </a:r>
+            <a:endParaRPr lang="en-US" sz="1400">
+              <a:solidFill>
+                <a:srgbClr val="1F3A5F"/>
+              </a:solidFill>
+              <a:latin typeface="Consolas"/>
+              <a:cs typeface="Consolas"/>
+            </a:endParaRPr>
           </a:p>
         </p:txBody>
       </p:sp>
@@ -6475,8 +7883,75 @@
                 <a:cs typeface="Consolas"/>
               </a:rPr>
               <a:t>
-var hash = MD5.Create();</a:t>
-            </a:r>
+</a:t>
+            </a:r>
+            <a:r>
+              <a:rPr lang="en-US" sz="1400">
+                <a:solidFill>
+                  <a:srgbClr val="0000FF"/>
+                </a:solidFill>
+                <a:latin typeface="Consolas"/>
+                <a:cs typeface="Consolas"/>
+              </a:rPr>
+              <a:t>var</a:t>
+            </a:r>
+            <a:r>
+              <a:rPr lang="en-US" sz="1400">
+                <a:solidFill>
+                  <a:srgbClr val="1F1F1F"/>
+                </a:solidFill>
+                <a:latin typeface="Consolas"/>
+                <a:cs typeface="Consolas"/>
+              </a:rPr>
+              <a:t> hash = </a:t>
+            </a:r>
+            <a:r>
+              <a:rPr lang="en-US" sz="1400">
+                <a:solidFill>
+                  <a:srgbClr val="2B91AF"/>
+                </a:solidFill>
+                <a:latin typeface="Consolas"/>
+                <a:cs typeface="Consolas"/>
+              </a:rPr>
+              <a:t>MD5</a:t>
+            </a:r>
+            <a:r>
+              <a:rPr lang="en-US" sz="1400">
+                <a:solidFill>
+                  <a:srgbClr val="1F1F1F"/>
+                </a:solidFill>
+                <a:latin typeface="Consolas"/>
+                <a:cs typeface="Consolas"/>
+              </a:rPr>
+              <a:t>.</a:t>
+            </a:r>
+            <a:r>
+              <a:rPr lang="en-US" sz="1400">
+                <a:solidFill>
+                  <a:srgbClr val="74531F"/>
+                </a:solidFill>
+                <a:latin typeface="Consolas"/>
+                <a:cs typeface="Consolas"/>
+              </a:rPr>
+              <a:t>Create</a:t>
+            </a:r>
+            <a:r>
+              <a:rPr lang="en-US" sz="1400">
+                <a:solidFill>
+                  <a:srgbClr val="1F1F1F"/>
+                </a:solidFill>
+                <a:latin typeface="Consolas"/>
+                <a:cs typeface="Consolas"/>
+              </a:rPr>
+              <a:t>();</a:t>
+            </a:r>
+            <a:endParaRPr lang="en-US" sz="1400">
+              <a:solidFill>
+                <a:srgbClr val="1F3A5F"/>
+              </a:solidFill>
+              <a:latin typeface="Consolas"/>
+              <a:cs typeface="Consolas"/>
+            </a:endParaRPr>
           </a:p>
         </p:txBody>
       </p:sp>
@@ -6574,8 +8049,75 @@
                 <a:cs typeface="Consolas"/>
               </a:rPr>
               <a:t>
-var hash = SHA256.Create();</a:t>
-            </a:r>
+</a:t>
+            </a:r>
+            <a:r>
+              <a:rPr lang="en-US" sz="1400">
+                <a:solidFill>
+                  <a:srgbClr val="0000FF"/>
+                </a:solidFill>
+                <a:latin typeface="Consolas"/>
+                <a:cs typeface="Consolas"/>
+              </a:rPr>
+              <a:t>var</a:t>
+            </a:r>
+            <a:r>
+              <a:rPr lang="en-US" sz="1400">
+                <a:solidFill>
+                  <a:srgbClr val="1F1F1F"/>
+                </a:solidFill>
+                <a:latin typeface="Consolas"/>
+                <a:cs typeface="Consolas"/>
+              </a:rPr>
+              <a:t> hash = </a:t>
+            </a:r>
+            <a:r>
+              <a:rPr lang="en-US" sz="1400">
+                <a:solidFill>
+                  <a:srgbClr val="2B91AF"/>
+                </a:solidFill>
+                <a:latin typeface="Consolas"/>
+                <a:cs typeface="Consolas"/>
+              </a:rPr>
+              <a:t>SHA256</a:t>
+            </a:r>
+            <a:r>
+              <a:rPr lang="en-US" sz="1400">
+                <a:solidFill>
+                  <a:srgbClr val="1F1F1F"/>
+                </a:solidFill>
+                <a:latin typeface="Consolas"/>
+                <a:cs typeface="Consolas"/>
+              </a:rPr>
+              <a:t>.</a:t>
+            </a:r>
+            <a:r>
+              <a:rPr lang="en-US" sz="1400">
+                <a:solidFill>
+                  <a:srgbClr val="74531F"/>
+                </a:solidFill>
+                <a:latin typeface="Consolas"/>
+                <a:cs typeface="Consolas"/>
+              </a:rPr>
+              <a:t>Create</a:t>
+            </a:r>
+            <a:r>
+              <a:rPr lang="en-US" sz="1400">
+                <a:solidFill>
+                  <a:srgbClr val="1F1F1F"/>
+                </a:solidFill>
+                <a:latin typeface="Consolas"/>
+                <a:cs typeface="Consolas"/>
+              </a:rPr>
+              <a:t>();</a:t>
+            </a:r>
+            <a:endParaRPr lang="en-US" sz="1400">
+              <a:solidFill>
+                <a:srgbClr val="1F3A5F"/>
+              </a:solidFill>
+              <a:latin typeface="Consolas"/>
+              <a:cs typeface="Consolas"/>
+            </a:endParaRPr>
           </a:p>
         </p:txBody>
       </p:sp>
@@ -6840,10 +8382,137 @@
                 <a:cs typeface="Consolas"/>
               </a:rPr>
               <a:t>
-var id = Request.Query["id"];
-var sql = Build(id);   // returns "... WHERE Id=" + id
-db.ExecuteSqlRaw(sql);</a:t>
-            </a:r>
+</a:t>
+            </a:r>
+            <a:r>
+              <a:rPr lang="en-US" sz="1400">
+                <a:solidFill>
+                  <a:srgbClr val="0000FF"/>
+                </a:solidFill>
+                <a:latin typeface="Consolas"/>
+                <a:cs typeface="Consolas"/>
+              </a:rPr>
+              <a:t>var</a:t>
+            </a:r>
+            <a:r>
+              <a:rPr lang="en-US" sz="1400">
+                <a:solidFill>
+                  <a:srgbClr val="1F1F1F"/>
+                </a:solidFill>
+                <a:latin typeface="Consolas"/>
+                <a:cs typeface="Consolas"/>
+              </a:rPr>
+              <a:t> id = Request.Query[</a:t>
+            </a:r>
+            <a:r>
+              <a:rPr lang="en-US" sz="1400">
+                <a:solidFill>
+                  <a:srgbClr val="A31515"/>
+                </a:solidFill>
+                <a:latin typeface="Consolas"/>
+                <a:cs typeface="Consolas"/>
+              </a:rPr>
+              <a:t>"id"</a:t>
+            </a:r>
+            <a:r>
+              <a:rPr lang="en-US" sz="1400">
+                <a:solidFill>
+                  <a:srgbClr val="1F1F1F"/>
+                </a:solidFill>
+                <a:latin typeface="Consolas"/>
+                <a:cs typeface="Consolas"/>
+              </a:rPr>
+              <a:t>];
+</a:t>
+            </a:r>
+            <a:r>
+              <a:rPr lang="en-US" sz="1400">
+                <a:solidFill>
+                  <a:srgbClr val="0000FF"/>
+                </a:solidFill>
+                <a:latin typeface="Consolas"/>
+                <a:cs typeface="Consolas"/>
+              </a:rPr>
+              <a:t>var</a:t>
+            </a:r>
+            <a:r>
+              <a:rPr lang="en-US" sz="1400">
+                <a:solidFill>
+                  <a:srgbClr val="1F1F1F"/>
+                </a:solidFill>
+                <a:latin typeface="Consolas"/>
+                <a:cs typeface="Consolas"/>
+              </a:rPr>
+              <a:t> sql = </a:t>
+            </a:r>
+            <a:r>
+              <a:rPr lang="en-US" sz="1400">
+                <a:solidFill>
+                  <a:srgbClr val="74531F"/>
+                </a:solidFill>
+                <a:latin typeface="Consolas"/>
+                <a:cs typeface="Consolas"/>
+              </a:rPr>
+              <a:t>Build</a:t>
+            </a:r>
+            <a:r>
+              <a:rPr lang="en-US" sz="1400">
+                <a:solidFill>
+                  <a:srgbClr val="1F1F1F"/>
+                </a:solidFill>
+                <a:latin typeface="Consolas"/>
+                <a:cs typeface="Consolas"/>
+              </a:rPr>
+              <a:t>(id);   </a:t>
+            </a:r>
+            <a:r>
+              <a:rPr lang="en-US" sz="1400">
+                <a:solidFill>
+                  <a:srgbClr val="008000"/>
+                </a:solidFill>
+                <a:latin typeface="Consolas"/>
+                <a:cs typeface="Consolas"/>
+              </a:rPr>
+              <a:t>// returns "... WHERE Id=" + id</a:t>
+            </a:r>
+            <a:r>
+              <a:rPr lang="en-US" sz="1400">
+                <a:solidFill>
+                  <a:srgbClr val="1F1F1F"/>
+                </a:solidFill>
+                <a:latin typeface="Consolas"/>
+                <a:cs typeface="Consolas"/>
+              </a:rPr>
+              <a:t>
+db.</a:t>
+            </a:r>
+            <a:r>
+              <a:rPr lang="en-US" sz="1400">
+                <a:solidFill>
+                  <a:srgbClr val="74531F"/>
+                </a:solidFill>
+                <a:latin typeface="Consolas"/>
+                <a:cs typeface="Consolas"/>
+              </a:rPr>
+              <a:t>ExecuteSqlRaw</a:t>
+            </a:r>
+            <a:r>
+              <a:rPr lang="en-US" sz="1400">
+                <a:solidFill>
+                  <a:srgbClr val="1F1F1F"/>
+                </a:solidFill>
+                <a:latin typeface="Consolas"/>
+                <a:cs typeface="Consolas"/>
+              </a:rPr>
+              <a:t>(sql);</a:t>
+            </a:r>
+            <a:endParaRPr lang="en-US" sz="1400">
+              <a:solidFill>
+                <a:srgbClr val="1F3A5F"/>
+              </a:solidFill>
+              <a:latin typeface="Consolas"/>
+              <a:cs typeface="Consolas"/>
+            </a:endParaRPr>
           </a:p>
         </p:txBody>
       </p:sp>
@@ -6941,8 +8610,65 @@
                 <a:cs typeface="Consolas"/>
               </a:rPr>
               <a:t>
-db.Users.FromSqlInterpolated($"SELECT * FROM Users WHERE Id={id}");</a:t>
-            </a:r>
+</a:t>
+            </a:r>
+            <a:r>
+              <a:rPr lang="en-US" sz="1400">
+                <a:solidFill>
+                  <a:srgbClr val="1F1F1F"/>
+                </a:solidFill>
+                <a:latin typeface="Consolas"/>
+                <a:cs typeface="Consolas"/>
+              </a:rPr>
+              <a:t>db.Users.</a:t>
+            </a:r>
+            <a:r>
+              <a:rPr lang="en-US" sz="1400">
+                <a:solidFill>
+                  <a:srgbClr val="74531F"/>
+                </a:solidFill>
+                <a:latin typeface="Consolas"/>
+                <a:cs typeface="Consolas"/>
+              </a:rPr>
+              <a:t>FromSqlInterpolated</a:t>
+            </a:r>
+            <a:r>
+              <a:rPr lang="en-US" sz="1400">
+                <a:solidFill>
+                  <a:srgbClr val="1F1F1F"/>
+                </a:solidFill>
+                <a:latin typeface="Consolas"/>
+                <a:cs typeface="Consolas"/>
+              </a:rPr>
+              <a:t>(</a:t>
+            </a:r>
+            <a:r>
+              <a:rPr lang="en-US" sz="1400">
+                <a:solidFill>
+                  <a:srgbClr val="A31515"/>
+                </a:solidFill>
+                <a:latin typeface="Consolas"/>
+                <a:cs typeface="Consolas"/>
+              </a:rPr>
+              <a:t>$"SELECT * FROM Users WHERE Id={id}"</a:t>
+            </a:r>
+            <a:r>
+              <a:rPr lang="en-US" sz="1400">
+                <a:solidFill>
+                  <a:srgbClr val="1F1F1F"/>
+                </a:solidFill>
+                <a:latin typeface="Consolas"/>
+                <a:cs typeface="Consolas"/>
+              </a:rPr>
+              <a:t>);</a:t>
+            </a:r>
+            <a:endParaRPr lang="en-US" sz="1400">
+              <a:solidFill>
+                <a:srgbClr val="1F3A5F"/>
+              </a:solidFill>
+              <a:latin typeface="Consolas"/>
+              <a:cs typeface="Consolas"/>
+            </a:endParaRPr>
           </a:p>
         </p:txBody>
       </p:sp>
@@ -7207,9 +8933,96 @@
                 <a:cs typeface="Consolas"/>
               </a:rPr>
               <a:t>
-var sql = "SELECT * FROM Users WHERE Name='"
-        + Request.Query["name"] + "'";</a:t>
-            </a:r>
+</a:t>
+            </a:r>
+            <a:r>
+              <a:rPr lang="en-US" sz="1400">
+                <a:solidFill>
+                  <a:srgbClr val="0000FF"/>
+                </a:solidFill>
+                <a:latin typeface="Consolas"/>
+                <a:cs typeface="Consolas"/>
+              </a:rPr>
+              <a:t>var</a:t>
+            </a:r>
+            <a:r>
+              <a:rPr lang="en-US" sz="1400">
+                <a:solidFill>
+                  <a:srgbClr val="1F1F1F"/>
+                </a:solidFill>
+                <a:latin typeface="Consolas"/>
+                <a:cs typeface="Consolas"/>
+              </a:rPr>
+              <a:t> sql = </a:t>
+            </a:r>
+            <a:r>
+              <a:rPr lang="en-US" sz="1400">
+                <a:solidFill>
+                  <a:srgbClr val="A31515"/>
+                </a:solidFill>
+                <a:latin typeface="Consolas"/>
+                <a:cs typeface="Consolas"/>
+              </a:rPr>
+              <a:t>"SELECT * FROM Users WHERE Name='"</a:t>
+            </a:r>
+            <a:r>
+              <a:rPr lang="en-US" sz="1400">
+                <a:solidFill>
+                  <a:srgbClr val="1F1F1F"/>
+                </a:solidFill>
+                <a:latin typeface="Consolas"/>
+                <a:cs typeface="Consolas"/>
+              </a:rPr>
+              <a:t>
+        + Request.Query[</a:t>
+            </a:r>
+            <a:r>
+              <a:rPr lang="en-US" sz="1400">
+                <a:solidFill>
+                  <a:srgbClr val="A31515"/>
+                </a:solidFill>
+                <a:latin typeface="Consolas"/>
+                <a:cs typeface="Consolas"/>
+              </a:rPr>
+              <a:t>"name"</a:t>
+            </a:r>
+            <a:r>
+              <a:rPr lang="en-US" sz="1400">
+                <a:solidFill>
+                  <a:srgbClr val="1F1F1F"/>
+                </a:solidFill>
+                <a:latin typeface="Consolas"/>
+                <a:cs typeface="Consolas"/>
+              </a:rPr>
+              <a:t>] + </a:t>
+            </a:r>
+            <a:r>
+              <a:rPr lang="en-US" sz="1400">
+                <a:solidFill>
+                  <a:srgbClr val="A31515"/>
+                </a:solidFill>
+                <a:latin typeface="Consolas"/>
+                <a:cs typeface="Consolas"/>
+              </a:rPr>
+              <a:t>"'"</a:t>
+            </a:r>
+            <a:r>
+              <a:rPr lang="en-US" sz="1400">
+                <a:solidFill>
+                  <a:srgbClr val="1F1F1F"/>
+                </a:solidFill>
+                <a:latin typeface="Consolas"/>
+                <a:cs typeface="Consolas"/>
+              </a:rPr>
+              <a:t>;</a:t>
+            </a:r>
+            <a:endParaRPr lang="en-US" sz="1400">
+              <a:solidFill>
+                <a:srgbClr val="1F3A5F"/>
+              </a:solidFill>
+              <a:latin typeface="Consolas"/>
+              <a:cs typeface="Consolas"/>
+            </a:endParaRPr>
           </a:p>
         </p:txBody>
       </p:sp>
@@ -7307,9 +9120,176 @@
                 <a:cs typeface="Consolas"/>
               </a:rPr>
               <a:t>
-var cmd = new SqlCommand("SELECT * FROM Users WHERE Name=@name", conn);
-cmd.Parameters.AddWithValue("@name", (string)Request.Query["name"]);</a:t>
-            </a:r>
+</a:t>
+            </a:r>
+            <a:r>
+              <a:rPr lang="en-US" sz="1400">
+                <a:solidFill>
+                  <a:srgbClr val="0000FF"/>
+                </a:solidFill>
+                <a:latin typeface="Consolas"/>
+                <a:cs typeface="Consolas"/>
+              </a:rPr>
+              <a:t>var</a:t>
+            </a:r>
+            <a:r>
+              <a:rPr lang="en-US" sz="1400">
+                <a:solidFill>
+                  <a:srgbClr val="1F1F1F"/>
+                </a:solidFill>
+                <a:latin typeface="Consolas"/>
+                <a:cs typeface="Consolas"/>
+              </a:rPr>
+              <a:t> cmd = </a:t>
+            </a:r>
+            <a:r>
+              <a:rPr lang="en-US" sz="1400">
+                <a:solidFill>
+                  <a:srgbClr val="0000FF"/>
+                </a:solidFill>
+                <a:latin typeface="Consolas"/>
+                <a:cs typeface="Consolas"/>
+              </a:rPr>
+              <a:t>new</a:t>
+            </a:r>
+            <a:r>
+              <a:rPr lang="en-US" sz="1400">
+                <a:solidFill>
+                  <a:srgbClr val="1F1F1F"/>
+                </a:solidFill>
+                <a:latin typeface="Consolas"/>
+                <a:cs typeface="Consolas"/>
+              </a:rPr>
+              <a:t> </a:t>
+            </a:r>
+            <a:r>
+              <a:rPr lang="en-US" sz="1400">
+                <a:solidFill>
+                  <a:srgbClr val="2B91AF"/>
+                </a:solidFill>
+                <a:latin typeface="Consolas"/>
+                <a:cs typeface="Consolas"/>
+              </a:rPr>
+              <a:t>SqlCommand</a:t>
+            </a:r>
+            <a:r>
+              <a:rPr lang="en-US" sz="1400">
+                <a:solidFill>
+                  <a:srgbClr val="1F1F1F"/>
+                </a:solidFill>
+                <a:latin typeface="Consolas"/>
+                <a:cs typeface="Consolas"/>
+              </a:rPr>
+              <a:t>(</a:t>
+            </a:r>
+            <a:r>
+              <a:rPr lang="en-US" sz="1400">
+                <a:solidFill>
+                  <a:srgbClr val="A31515"/>
+                </a:solidFill>
+                <a:latin typeface="Consolas"/>
+                <a:cs typeface="Consolas"/>
+              </a:rPr>
+              <a:t>"SELECT * FROM Users WHERE Name=@name"</a:t>
+            </a:r>
+            <a:r>
+              <a:rPr lang="en-US" sz="1400">
+                <a:solidFill>
+                  <a:srgbClr val="1F1F1F"/>
+                </a:solidFill>
+                <a:latin typeface="Consolas"/>
+                <a:cs typeface="Consolas"/>
+              </a:rPr>
+              <a:t>, conn);
+cmd.Parameters.</a:t>
+            </a:r>
+            <a:r>
+              <a:rPr lang="en-US" sz="1400">
+                <a:solidFill>
+                  <a:srgbClr val="74531F"/>
+                </a:solidFill>
+                <a:latin typeface="Consolas"/>
+                <a:cs typeface="Consolas"/>
+              </a:rPr>
+              <a:t>AddWithValue</a:t>
+            </a:r>
+            <a:r>
+              <a:rPr lang="en-US" sz="1400">
+                <a:solidFill>
+                  <a:srgbClr val="1F1F1F"/>
+                </a:solidFill>
+                <a:latin typeface="Consolas"/>
+                <a:cs typeface="Consolas"/>
+              </a:rPr>
+              <a:t>(</a:t>
+            </a:r>
+            <a:r>
+              <a:rPr lang="en-US" sz="1400">
+                <a:solidFill>
+                  <a:srgbClr val="A31515"/>
+                </a:solidFill>
+                <a:latin typeface="Consolas"/>
+                <a:cs typeface="Consolas"/>
+              </a:rPr>
+              <a:t>"@name"</a:t>
+            </a:r>
+            <a:r>
+              <a:rPr lang="en-US" sz="1400">
+                <a:solidFill>
+                  <a:srgbClr val="1F1F1F"/>
+                </a:solidFill>
+                <a:latin typeface="Consolas"/>
+                <a:cs typeface="Consolas"/>
+              </a:rPr>
+              <a:t>, (</a:t>
+            </a:r>
+            <a:r>
+              <a:rPr lang="en-US" sz="1400">
+                <a:solidFill>
+                  <a:srgbClr val="0000FF"/>
+                </a:solidFill>
+                <a:latin typeface="Consolas"/>
+                <a:cs typeface="Consolas"/>
+              </a:rPr>
+              <a:t>string</a:t>
+            </a:r>
+            <a:r>
+              <a:rPr lang="en-US" sz="1400">
+                <a:solidFill>
+                  <a:srgbClr val="1F1F1F"/>
+                </a:solidFill>
+                <a:latin typeface="Consolas"/>
+                <a:cs typeface="Consolas"/>
+              </a:rPr>
+              <a:t>)Request.Query[</a:t>
+            </a:r>
+            <a:r>
+              <a:rPr lang="en-US" sz="1400">
+                <a:solidFill>
+                  <a:srgbClr val="A31515"/>
+                </a:solidFill>
+                <a:latin typeface="Consolas"/>
+                <a:cs typeface="Consolas"/>
+              </a:rPr>
+              <a:t>"name"</a:t>
+            </a:r>
+            <a:r>
+              <a:rPr lang="en-US" sz="1400">
+                <a:solidFill>
+                  <a:srgbClr val="1F1F1F"/>
+                </a:solidFill>
+                <a:latin typeface="Consolas"/>
+                <a:cs typeface="Consolas"/>
+              </a:rPr>
+              <a:t>]);</a:t>
+            </a:r>
+            <a:endParaRPr lang="en-US" sz="1400">
+              <a:solidFill>
+                <a:srgbClr val="1F3A5F"/>
+              </a:solidFill>
+              <a:latin typeface="Consolas"/>
+              <a:cs typeface="Consolas"/>
+            </a:endParaRPr>
           </a:p>
         </p:txBody>
       </p:sp>
@@ -7459,13 +9439,260 @@
                 <a:cs typeface="Consolas"/>
               </a:rPr>
               <a:t>
-&lt;ItemGroup&gt;
-  &lt;PackageReference
-    Include="StyleCop.Analyzers"
-    Version="1.1.118"
-    PrivateAssets="all" /&gt;
-&lt;/ItemGroup&gt;</a:t>
-            </a:r>
+</a:t>
+            </a:r>
+            <a:r>
+              <a:rPr lang="en-US" sz="1400">
+                <a:solidFill>
+                  <a:srgbClr val="0000FF"/>
+                </a:solidFill>
+                <a:latin typeface="Consolas"/>
+                <a:cs typeface="Consolas"/>
+              </a:rPr>
+              <a:t>&lt;</a:t>
+            </a:r>
+            <a:r>
+              <a:rPr lang="en-US" sz="1400">
+                <a:solidFill>
+                  <a:srgbClr val="A31515"/>
+                </a:solidFill>
+                <a:latin typeface="Consolas"/>
+                <a:cs typeface="Consolas"/>
+              </a:rPr>
+              <a:t>ItemGroup</a:t>
+            </a:r>
+            <a:r>
+              <a:rPr lang="en-US" sz="1400">
+                <a:solidFill>
+                  <a:srgbClr val="0000FF"/>
+                </a:solidFill>
+                <a:latin typeface="Consolas"/>
+                <a:cs typeface="Consolas"/>
+              </a:rPr>
+              <a:t>&gt;</a:t>
+            </a:r>
+            <a:r>
+              <a:rPr lang="en-US" sz="1400">
+                <a:solidFill>
+                  <a:srgbClr val="1F1F1F"/>
+                </a:solidFill>
+                <a:latin typeface="Consolas"/>
+                <a:cs typeface="Consolas"/>
+              </a:rPr>
+              <a:t>
+  </a:t>
+            </a:r>
+            <a:r>
+              <a:rPr lang="en-US" sz="1400">
+                <a:solidFill>
+                  <a:srgbClr val="0000FF"/>
+                </a:solidFill>
+                <a:latin typeface="Consolas"/>
+                <a:cs typeface="Consolas"/>
+              </a:rPr>
+              <a:t>&lt;</a:t>
+            </a:r>
+            <a:r>
+              <a:rPr lang="en-US" sz="1400">
+                <a:solidFill>
+                  <a:srgbClr val="A31515"/>
+                </a:solidFill>
+                <a:latin typeface="Consolas"/>
+                <a:cs typeface="Consolas"/>
+              </a:rPr>
+              <a:t>PackageReference</a:t>
+            </a:r>
+            <a:r>
+              <a:rPr lang="en-US" sz="1400">
+                <a:solidFill>
+                  <a:srgbClr val="1F1F1F"/>
+                </a:solidFill>
+                <a:latin typeface="Consolas"/>
+                <a:cs typeface="Consolas"/>
+              </a:rPr>
+              <a:t>
+    </a:t>
+            </a:r>
+            <a:r>
+              <a:rPr lang="en-US" sz="1400">
+                <a:solidFill>
+                  <a:srgbClr val="E50000"/>
+                </a:solidFill>
+                <a:latin typeface="Consolas"/>
+                <a:cs typeface="Consolas"/>
+              </a:rPr>
+              <a:t>Include</a:t>
+            </a:r>
+            <a:r>
+              <a:rPr lang="en-US" sz="1400">
+                <a:solidFill>
+                  <a:srgbClr val="1F1F1F"/>
+                </a:solidFill>
+                <a:latin typeface="Consolas"/>
+                <a:cs typeface="Consolas"/>
+              </a:rPr>
+              <a:t>=</a:t>
+            </a:r>
+            <a:r>
+              <a:rPr lang="en-US" sz="1400">
+                <a:solidFill>
+                  <a:srgbClr val="0000FF"/>
+                </a:solidFill>
+                <a:latin typeface="Consolas"/>
+                <a:cs typeface="Consolas"/>
+              </a:rPr>
+              <a:t>"StyleCop.Analyzers"</a:t>
+            </a:r>
+            <a:r>
+              <a:rPr lang="en-US" sz="1400">
+                <a:solidFill>
+                  <a:srgbClr val="1F1F1F"/>
+                </a:solidFill>
+                <a:latin typeface="Consolas"/>
+                <a:cs typeface="Consolas"/>
+              </a:rPr>
+              <a:t>
+    </a:t>
+            </a:r>
+            <a:r>
+              <a:rPr lang="en-US" sz="1400">
+                <a:solidFill>
+                  <a:srgbClr val="E50000"/>
+                </a:solidFill>
+                <a:latin typeface="Consolas"/>
+                <a:cs typeface="Consolas"/>
+              </a:rPr>
+              <a:t>Version</a:t>
+            </a:r>
+            <a:r>
+              <a:rPr lang="en-US" sz="1400">
+                <a:solidFill>
+                  <a:srgbClr val="1F1F1F"/>
+                </a:solidFill>
+                <a:latin typeface="Consolas"/>
+                <a:cs typeface="Consolas"/>
+              </a:rPr>
+              <a:t>=</a:t>
+            </a:r>
+            <a:r>
+              <a:rPr lang="en-US" sz="1400">
+                <a:solidFill>
+                  <a:srgbClr val="0000FF"/>
+                </a:solidFill>
+                <a:latin typeface="Consolas"/>
+                <a:cs typeface="Consolas"/>
+              </a:rPr>
+              <a:t>"1.1.118"</a:t>
+            </a:r>
+            <a:r>
+              <a:rPr lang="en-US" sz="1400">
+                <a:solidFill>
+                  <a:srgbClr val="1F1F1F"/>
+                </a:solidFill>
+                <a:latin typeface="Consolas"/>
+                <a:cs typeface="Consolas"/>
+              </a:rPr>
+              <a:t>
+    </a:t>
+            </a:r>
+            <a:r>
+              <a:rPr lang="en-US" sz="1400">
+                <a:solidFill>
+                  <a:srgbClr val="E50000"/>
+                </a:solidFill>
+                <a:latin typeface="Consolas"/>
+                <a:cs typeface="Consolas"/>
+              </a:rPr>
+              <a:t>PrivateAssets</a:t>
+            </a:r>
+            <a:r>
+              <a:rPr lang="en-US" sz="1400">
+                <a:solidFill>
+                  <a:srgbClr val="1F1F1F"/>
+                </a:solidFill>
+                <a:latin typeface="Consolas"/>
+                <a:cs typeface="Consolas"/>
+              </a:rPr>
+              <a:t>=</a:t>
+            </a:r>
+            <a:r>
+              <a:rPr lang="en-US" sz="1400">
+                <a:solidFill>
+                  <a:srgbClr val="0000FF"/>
+                </a:solidFill>
+                <a:latin typeface="Consolas"/>
+                <a:cs typeface="Consolas"/>
+              </a:rPr>
+              <a:t>"all"</a:t>
+            </a:r>
+            <a:r>
+              <a:rPr lang="en-US" sz="1400">
+                <a:solidFill>
+                  <a:srgbClr val="1F1F1F"/>
+                </a:solidFill>
+                <a:latin typeface="Consolas"/>
+                <a:cs typeface="Consolas"/>
+              </a:rPr>
+              <a:t> </a:t>
+            </a:r>
+            <a:r>
+              <a:rPr lang="en-US" sz="1400">
+                <a:solidFill>
+                  <a:srgbClr val="0000FF"/>
+                </a:solidFill>
+                <a:latin typeface="Consolas"/>
+                <a:cs typeface="Consolas"/>
+              </a:rPr>
+              <a:t>/&gt;</a:t>
+            </a:r>
+            <a:r>
+              <a:rPr lang="en-US" sz="1400">
+                <a:solidFill>
+                  <a:srgbClr val="1F1F1F"/>
+                </a:solidFill>
+                <a:latin typeface="Consolas"/>
+                <a:cs typeface="Consolas"/>
+              </a:rPr>
+              <a:t>
+</a:t>
+            </a:r>
+            <a:r>
+              <a:rPr lang="en-US" sz="1400">
+                <a:solidFill>
+                  <a:srgbClr val="0000FF"/>
+                </a:solidFill>
+                <a:latin typeface="Consolas"/>
+                <a:cs typeface="Consolas"/>
+              </a:rPr>
+              <a:t>&lt;/</a:t>
+            </a:r>
+            <a:r>
+              <a:rPr lang="en-US" sz="1400">
+                <a:solidFill>
+                  <a:srgbClr val="A31515"/>
+                </a:solidFill>
+                <a:latin typeface="Consolas"/>
+                <a:cs typeface="Consolas"/>
+              </a:rPr>
+              <a:t>ItemGroup</a:t>
+            </a:r>
+            <a:r>
+              <a:rPr lang="en-US" sz="1400">
+                <a:solidFill>
+                  <a:srgbClr val="0000FF"/>
+                </a:solidFill>
+                <a:latin typeface="Consolas"/>
+                <a:cs typeface="Consolas"/>
+              </a:rPr>
+              <a:t>&gt;</a:t>
+            </a:r>
+            <a:endParaRPr lang="en-US" sz="1400">
+              <a:solidFill>
+                <a:srgbClr val="1F3A5F"/>
+              </a:solidFill>
+              <a:latin typeface="Consolas"/>
+              <a:cs typeface="Consolas"/>
+            </a:endParaRPr>
           </a:p>
         </p:txBody>
       </p:sp>
@@ -7541,9 +9768,46 @@
                 <a:cs typeface="Consolas"/>
               </a:rPr>
               <a:t>
-dotnet_diagnostic.SA1503.severity
-  = error</a:t>
-            </a:r>
+</a:t>
+            </a:r>
+            <a:r>
+              <a:rPr lang="en-US" sz="1400">
+                <a:solidFill>
+                  <a:srgbClr val="2B91AF"/>
+                </a:solidFill>
+                <a:latin typeface="Consolas"/>
+                <a:cs typeface="Consolas"/>
+              </a:rPr>
+              <a:t>dotnet_diagnostic.SA1503.severity</a:t>
+            </a:r>
+            <a:r>
+              <a:rPr lang="en-US" sz="1400">
+                <a:solidFill>
+                  <a:srgbClr val="1F1F1F"/>
+                </a:solidFill>
+                <a:latin typeface="Consolas"/>
+                <a:cs typeface="Consolas"/>
+              </a:rPr>
+              <a:t>
+  = </a:t>
+            </a:r>
+            <a:r>
+              <a:rPr lang="en-US" sz="1400">
+                <a:solidFill>
+                  <a:srgbClr val="0000FF"/>
+                </a:solidFill>
+                <a:latin typeface="Consolas"/>
+                <a:cs typeface="Consolas"/>
+              </a:rPr>
+              <a:t>error</a:t>
+            </a:r>
+            <a:endParaRPr lang="en-US" sz="1400">
+              <a:solidFill>
+                <a:srgbClr val="1F3A5F"/>
+              </a:solidFill>
+              <a:latin typeface="Consolas"/>
+              <a:cs typeface="Consolas"/>
+            </a:endParaRPr>
           </a:p>
         </p:txBody>
       </p:sp>
@@ -8101,8 +10365,75 @@
                 <a:cs typeface="Consolas"/>
               </a:rPr>
               <a:t>
-Assert.Equal(0, items.Count);</a:t>
-            </a:r>
+</a:t>
+            </a:r>
+            <a:r>
+              <a:rPr lang="en-US" sz="1400">
+                <a:solidFill>
+                  <a:srgbClr val="2B91AF"/>
+                </a:solidFill>
+                <a:latin typeface="Consolas"/>
+                <a:cs typeface="Consolas"/>
+              </a:rPr>
+              <a:t>Assert</a:t>
+            </a:r>
+            <a:r>
+              <a:rPr lang="en-US" sz="1400">
+                <a:solidFill>
+                  <a:srgbClr val="1F1F1F"/>
+                </a:solidFill>
+                <a:latin typeface="Consolas"/>
+                <a:cs typeface="Consolas"/>
+              </a:rPr>
+              <a:t>.</a:t>
+            </a:r>
+            <a:r>
+              <a:rPr lang="en-US" sz="1400">
+                <a:solidFill>
+                  <a:srgbClr val="74531F"/>
+                </a:solidFill>
+                <a:latin typeface="Consolas"/>
+                <a:cs typeface="Consolas"/>
+              </a:rPr>
+              <a:t>Equal</a:t>
+            </a:r>
+            <a:r>
+              <a:rPr lang="en-US" sz="1400">
+                <a:solidFill>
+                  <a:srgbClr val="1F1F1F"/>
+                </a:solidFill>
+                <a:latin typeface="Consolas"/>
+                <a:cs typeface="Consolas"/>
+              </a:rPr>
+              <a:t>(</a:t>
+            </a:r>
+            <a:r>
+              <a:rPr lang="en-US" sz="1400">
+                <a:solidFill>
+                  <a:srgbClr val="098658"/>
+                </a:solidFill>
+                <a:latin typeface="Consolas"/>
+                <a:cs typeface="Consolas"/>
+              </a:rPr>
+              <a:t>0</a:t>
+            </a:r>
+            <a:r>
+              <a:rPr lang="en-US" sz="1400">
+                <a:solidFill>
+                  <a:srgbClr val="1F1F1F"/>
+                </a:solidFill>
+                <a:latin typeface="Consolas"/>
+                <a:cs typeface="Consolas"/>
+              </a:rPr>
+              <a:t>, items.Count);</a:t>
+            </a:r>
+            <a:endParaRPr lang="en-US" sz="1400">
+              <a:solidFill>
+                <a:srgbClr val="1F3A5F"/>
+              </a:solidFill>
+              <a:latin typeface="Consolas"/>
+              <a:cs typeface="Consolas"/>
+            </a:endParaRPr>
           </a:p>
         </p:txBody>
       </p:sp>
@@ -8200,8 +10531,55 @@
                 <a:cs typeface="Consolas"/>
               </a:rPr>
               <a:t>
-Assert.Empty(items);</a:t>
-            </a:r>
+</a:t>
+            </a:r>
+            <a:r>
+              <a:rPr lang="en-US" sz="1400">
+                <a:solidFill>
+                  <a:srgbClr val="2B91AF"/>
+                </a:solidFill>
+                <a:latin typeface="Consolas"/>
+                <a:cs typeface="Consolas"/>
+              </a:rPr>
+              <a:t>Assert</a:t>
+            </a:r>
+            <a:r>
+              <a:rPr lang="en-US" sz="1400">
+                <a:solidFill>
+                  <a:srgbClr val="1F1F1F"/>
+                </a:solidFill>
+                <a:latin typeface="Consolas"/>
+                <a:cs typeface="Consolas"/>
+              </a:rPr>
+              <a:t>.</a:t>
+            </a:r>
+            <a:r>
+              <a:rPr lang="en-US" sz="1400">
+                <a:solidFill>
+                  <a:srgbClr val="74531F"/>
+                </a:solidFill>
+                <a:latin typeface="Consolas"/>
+                <a:cs typeface="Consolas"/>
+              </a:rPr>
+              <a:t>Empty</a:t>
+            </a:r>
+            <a:r>
+              <a:rPr lang="en-US" sz="1400">
+                <a:solidFill>
+                  <a:srgbClr val="1F1F1F"/>
+                </a:solidFill>
+                <a:latin typeface="Consolas"/>
+                <a:cs typeface="Consolas"/>
+              </a:rPr>
+              <a:t>(items);</a:t>
+            </a:r>
+            <a:endParaRPr lang="en-US" sz="1400">
+              <a:solidFill>
+                <a:srgbClr val="1F3A5F"/>
+              </a:solidFill>
+              <a:latin typeface="Consolas"/>
+              <a:cs typeface="Consolas"/>
+            </a:endParaRPr>
           </a:p>
         </p:txBody>
       </p:sp>
@@ -8466,9 +10844,206 @@
                 <a:cs typeface="Consolas"/>
               </a:rPr>
               <a:t>
-class Repo { public int Count() =&gt; 0; }
-sub.Count().Returns(5);  // non-virtual, setup does nothing</a:t>
-            </a:r>
+</a:t>
+            </a:r>
+            <a:r>
+              <a:rPr lang="en-US" sz="1400">
+                <a:solidFill>
+                  <a:srgbClr val="0000FF"/>
+                </a:solidFill>
+                <a:latin typeface="Consolas"/>
+                <a:cs typeface="Consolas"/>
+              </a:rPr>
+              <a:t>class</a:t>
+            </a:r>
+            <a:r>
+              <a:rPr lang="en-US" sz="1400">
+                <a:solidFill>
+                  <a:srgbClr val="1F1F1F"/>
+                </a:solidFill>
+                <a:latin typeface="Consolas"/>
+                <a:cs typeface="Consolas"/>
+              </a:rPr>
+              <a:t> </a:t>
+            </a:r>
+            <a:r>
+              <a:rPr lang="en-US" sz="1400">
+                <a:solidFill>
+                  <a:srgbClr val="2B91AF"/>
+                </a:solidFill>
+                <a:latin typeface="Consolas"/>
+                <a:cs typeface="Consolas"/>
+              </a:rPr>
+              <a:t>Repo</a:t>
+            </a:r>
+            <a:r>
+              <a:rPr lang="en-US" sz="1400">
+                <a:solidFill>
+                  <a:srgbClr val="1F1F1F"/>
+                </a:solidFill>
+                <a:latin typeface="Consolas"/>
+                <a:cs typeface="Consolas"/>
+              </a:rPr>
+              <a:t> { </a:t>
+            </a:r>
+            <a:r>
+              <a:rPr lang="en-US" sz="1400">
+                <a:solidFill>
+                  <a:srgbClr val="0000FF"/>
+                </a:solidFill>
+                <a:latin typeface="Consolas"/>
+                <a:cs typeface="Consolas"/>
+              </a:rPr>
+              <a:t>public</a:t>
+            </a:r>
+            <a:r>
+              <a:rPr lang="en-US" sz="1400">
+                <a:solidFill>
+                  <a:srgbClr val="1F1F1F"/>
+                </a:solidFill>
+                <a:latin typeface="Consolas"/>
+                <a:cs typeface="Consolas"/>
+              </a:rPr>
+              <a:t> </a:t>
+            </a:r>
+            <a:r>
+              <a:rPr lang="en-US" sz="1400">
+                <a:solidFill>
+                  <a:srgbClr val="0000FF"/>
+                </a:solidFill>
+                <a:latin typeface="Consolas"/>
+                <a:cs typeface="Consolas"/>
+              </a:rPr>
+              <a:t>int</a:t>
+            </a:r>
+            <a:r>
+              <a:rPr lang="en-US" sz="1400">
+                <a:solidFill>
+                  <a:srgbClr val="1F1F1F"/>
+                </a:solidFill>
+                <a:latin typeface="Consolas"/>
+                <a:cs typeface="Consolas"/>
+              </a:rPr>
+              <a:t> </a:t>
+            </a:r>
+            <a:r>
+              <a:rPr lang="en-US" sz="1400">
+                <a:solidFill>
+                  <a:srgbClr val="74531F"/>
+                </a:solidFill>
+                <a:latin typeface="Consolas"/>
+                <a:cs typeface="Consolas"/>
+              </a:rPr>
+              <a:t>Count</a:t>
+            </a:r>
+            <a:r>
+              <a:rPr lang="en-US" sz="1400">
+                <a:solidFill>
+                  <a:srgbClr val="1F1F1F"/>
+                </a:solidFill>
+                <a:latin typeface="Consolas"/>
+                <a:cs typeface="Consolas"/>
+              </a:rPr>
+              <a:t>() =&gt; </a:t>
+            </a:r>
+            <a:r>
+              <a:rPr lang="en-US" sz="1400">
+                <a:solidFill>
+                  <a:srgbClr val="098658"/>
+                </a:solidFill>
+                <a:latin typeface="Consolas"/>
+                <a:cs typeface="Consolas"/>
+              </a:rPr>
+              <a:t>0</a:t>
+            </a:r>
+            <a:r>
+              <a:rPr lang="en-US" sz="1400">
+                <a:solidFill>
+                  <a:srgbClr val="1F1F1F"/>
+                </a:solidFill>
+                <a:latin typeface="Consolas"/>
+                <a:cs typeface="Consolas"/>
+              </a:rPr>
+              <a:t>; }
+sub.</a:t>
+            </a:r>
+            <a:r>
+              <a:rPr lang="en-US" sz="1400">
+                <a:solidFill>
+                  <a:srgbClr val="74531F"/>
+                </a:solidFill>
+                <a:latin typeface="Consolas"/>
+                <a:cs typeface="Consolas"/>
+              </a:rPr>
+              <a:t>Count</a:t>
+            </a:r>
+            <a:r>
+              <a:rPr lang="en-US" sz="1400">
+                <a:solidFill>
+                  <a:srgbClr val="1F1F1F"/>
+                </a:solidFill>
+                <a:latin typeface="Consolas"/>
+                <a:cs typeface="Consolas"/>
+              </a:rPr>
+              <a:t>().</a:t>
+            </a:r>
+            <a:r>
+              <a:rPr lang="en-US" sz="1400">
+                <a:solidFill>
+                  <a:srgbClr val="74531F"/>
+                </a:solidFill>
+                <a:latin typeface="Consolas"/>
+                <a:cs typeface="Consolas"/>
+              </a:rPr>
+              <a:t>Returns</a:t>
+            </a:r>
+            <a:r>
+              <a:rPr lang="en-US" sz="1400">
+                <a:solidFill>
+                  <a:srgbClr val="1F1F1F"/>
+                </a:solidFill>
+                <a:latin typeface="Consolas"/>
+                <a:cs typeface="Consolas"/>
+              </a:rPr>
+              <a:t>(</a:t>
+            </a:r>
+            <a:r>
+              <a:rPr lang="en-US" sz="1400">
+                <a:solidFill>
+                  <a:srgbClr val="098658"/>
+                </a:solidFill>
+                <a:latin typeface="Consolas"/>
+                <a:cs typeface="Consolas"/>
+              </a:rPr>
+              <a:t>5</a:t>
+            </a:r>
+            <a:r>
+              <a:rPr lang="en-US" sz="1400">
+                <a:solidFill>
+                  <a:srgbClr val="1F1F1F"/>
+                </a:solidFill>
+                <a:latin typeface="Consolas"/>
+                <a:cs typeface="Consolas"/>
+              </a:rPr>
+              <a:t>);  </a:t>
+            </a:r>
+            <a:r>
+              <a:rPr lang="en-US" sz="1400">
+                <a:solidFill>
+                  <a:srgbClr val="008000"/>
+                </a:solidFill>
+                <a:latin typeface="Consolas"/>
+                <a:cs typeface="Consolas"/>
+              </a:rPr>
+              <a:t>// non-virtual, setup does nothing</a:t>
+            </a:r>
+            <a:endParaRPr lang="en-US" sz="1400">
+              <a:solidFill>
+                <a:srgbClr val="1F3A5F"/>
+              </a:solidFill>
+              <a:latin typeface="Consolas"/>
+              <a:cs typeface="Consolas"/>
+            </a:endParaRPr>
           </a:p>
         </p:txBody>
       </p:sp>
@@ -8566,9 +11141,216 @@
                 <a:cs typeface="Consolas"/>
               </a:rPr>
               <a:t>
-class Repo { public virtual int Count() =&gt; 0; }
-sub.Count().Returns(5);</a:t>
-            </a:r>
+</a:t>
+            </a:r>
+            <a:r>
+              <a:rPr lang="en-US" sz="1400">
+                <a:solidFill>
+                  <a:srgbClr val="0000FF"/>
+                </a:solidFill>
+                <a:latin typeface="Consolas"/>
+                <a:cs typeface="Consolas"/>
+              </a:rPr>
+              <a:t>class</a:t>
+            </a:r>
+            <a:r>
+              <a:rPr lang="en-US" sz="1400">
+                <a:solidFill>
+                  <a:srgbClr val="1F1F1F"/>
+                </a:solidFill>
+                <a:latin typeface="Consolas"/>
+                <a:cs typeface="Consolas"/>
+              </a:rPr>
+              <a:t> </a:t>
+            </a:r>
+            <a:r>
+              <a:rPr lang="en-US" sz="1400">
+                <a:solidFill>
+                  <a:srgbClr val="2B91AF"/>
+                </a:solidFill>
+                <a:latin typeface="Consolas"/>
+                <a:cs typeface="Consolas"/>
+              </a:rPr>
+              <a:t>Repo</a:t>
+            </a:r>
+            <a:r>
+              <a:rPr lang="en-US" sz="1400">
+                <a:solidFill>
+                  <a:srgbClr val="1F1F1F"/>
+                </a:solidFill>
+                <a:latin typeface="Consolas"/>
+                <a:cs typeface="Consolas"/>
+              </a:rPr>
+              <a:t> { </a:t>
+            </a:r>
+            <a:r>
+              <a:rPr lang="en-US" sz="1400">
+                <a:solidFill>
+                  <a:srgbClr val="0000FF"/>
+                </a:solidFill>
+                <a:latin typeface="Consolas"/>
+                <a:cs typeface="Consolas"/>
+              </a:rPr>
+              <a:t>public</a:t>
+            </a:r>
+            <a:r>
+              <a:rPr lang="en-US" sz="1400">
+                <a:solidFill>
+                  <a:srgbClr val="1F1F1F"/>
+                </a:solidFill>
+                <a:latin typeface="Consolas"/>
+                <a:cs typeface="Consolas"/>
+              </a:rPr>
+              <a:t> </a:t>
+            </a:r>
+            <a:r>
+              <a:rPr lang="en-US" sz="1400">
+                <a:solidFill>
+                  <a:srgbClr val="0000FF"/>
+                </a:solidFill>
+                <a:latin typeface="Consolas"/>
+                <a:cs typeface="Consolas"/>
+              </a:rPr>
+              <a:t>virtual</a:t>
+            </a:r>
+            <a:r>
+              <a:rPr lang="en-US" sz="1400">
+                <a:solidFill>
+                  <a:srgbClr val="1F1F1F"/>
+                </a:solidFill>
+                <a:latin typeface="Consolas"/>
+                <a:cs typeface="Consolas"/>
+              </a:rPr>
+              <a:t> </a:t>
+            </a:r>
+            <a:r>
+              <a:rPr lang="en-US" sz="1400">
+                <a:solidFill>
+                  <a:srgbClr val="0000FF"/>
+                </a:solidFill>
+                <a:latin typeface="Consolas"/>
+                <a:cs typeface="Consolas"/>
+              </a:rPr>
+              <a:t>int</a:t>
+            </a:r>
+            <a:r>
+              <a:rPr lang="en-US" sz="1400">
+                <a:solidFill>
+                  <a:srgbClr val="1F1F1F"/>
+                </a:solidFill>
+                <a:latin typeface="Consolas"/>
+                <a:cs typeface="Consolas"/>
+              </a:rPr>
+              <a:t> </a:t>
+            </a:r>
+            <a:r>
+              <a:rPr lang="en-US" sz="1400">
+                <a:solidFill>
+                  <a:srgbClr val="74531F"/>
+                </a:solidFill>
+                <a:latin typeface="Consolas"/>
+                <a:cs typeface="Consolas"/>
+              </a:rPr>
+              <a:t>Count</a:t>
+            </a:r>
+            <a:r>
+              <a:rPr lang="en-US" sz="1400">
+                <a:solidFill>
+                  <a:srgbClr val="1F1F1F"/>
+                </a:solidFill>
+                <a:latin typeface="Consolas"/>
+                <a:cs typeface="Consolas"/>
+              </a:rPr>
+              <a:t>() =&gt; </a:t>
+            </a:r>
+            <a:r>
+              <a:rPr lang="en-US" sz="1400">
+                <a:solidFill>
+                  <a:srgbClr val="098658"/>
+                </a:solidFill>
+                <a:latin typeface="Consolas"/>
+                <a:cs typeface="Consolas"/>
+              </a:rPr>
+              <a:t>0</a:t>
+            </a:r>
+            <a:r>
+              <a:rPr lang="en-US" sz="1400">
+                <a:solidFill>
+                  <a:srgbClr val="1F1F1F"/>
+                </a:solidFill>
+                <a:latin typeface="Consolas"/>
+                <a:cs typeface="Consolas"/>
+              </a:rPr>
+              <a:t>; }
+sub.</a:t>
+            </a:r>
+            <a:r>
+              <a:rPr lang="en-US" sz="1400">
+                <a:solidFill>
+                  <a:srgbClr val="74531F"/>
+                </a:solidFill>
+                <a:latin typeface="Consolas"/>
+                <a:cs typeface="Consolas"/>
+              </a:rPr>
+              <a:t>Count</a:t>
+            </a:r>
+            <a:r>
+              <a:rPr lang="en-US" sz="1400">
+                <a:solidFill>
+                  <a:srgbClr val="1F1F1F"/>
+                </a:solidFill>
+                <a:latin typeface="Consolas"/>
+                <a:cs typeface="Consolas"/>
+              </a:rPr>
+              <a:t>().</a:t>
+            </a:r>
+            <a:r>
+              <a:rPr lang="en-US" sz="1400">
+                <a:solidFill>
+                  <a:srgbClr val="74531F"/>
+                </a:solidFill>
+                <a:latin typeface="Consolas"/>
+                <a:cs typeface="Consolas"/>
+              </a:rPr>
+              <a:t>Returns</a:t>
+            </a:r>
+            <a:r>
+              <a:rPr lang="en-US" sz="1400">
+                <a:solidFill>
+                  <a:srgbClr val="1F1F1F"/>
+                </a:solidFill>
+                <a:latin typeface="Consolas"/>
+                <a:cs typeface="Consolas"/>
+              </a:rPr>
+              <a:t>(</a:t>
+            </a:r>
+            <a:r>
+              <a:rPr lang="en-US" sz="1400">
+                <a:solidFill>
+                  <a:srgbClr val="098658"/>
+                </a:solidFill>
+                <a:latin typeface="Consolas"/>
+                <a:cs typeface="Consolas"/>
+              </a:rPr>
+              <a:t>5</a:t>
+            </a:r>
+            <a:r>
+              <a:rPr lang="en-US" sz="1400">
+                <a:solidFill>
+                  <a:srgbClr val="1F1F1F"/>
+                </a:solidFill>
+                <a:latin typeface="Consolas"/>
+                <a:cs typeface="Consolas"/>
+              </a:rPr>
+              <a:t>);</a:t>
+            </a:r>
+            <a:endParaRPr lang="en-US" sz="1400">
+              <a:solidFill>
+                <a:srgbClr val="1F3A5F"/>
+              </a:solidFill>
+              <a:latin typeface="Consolas"/>
+              <a:cs typeface="Consolas"/>
+            </a:endParaRPr>
           </a:p>
         </p:txBody>
       </p:sp>
@@ -8833,8 +11615,65 @@
                 <a:cs typeface="Consolas"/>
               </a:rPr>
               <a:t>
-log.Information("Got {userId}", id);</a:t>
-            </a:r>
+</a:t>
+            </a:r>
+            <a:r>
+              <a:rPr lang="en-US" sz="1400">
+                <a:solidFill>
+                  <a:srgbClr val="1F1F1F"/>
+                </a:solidFill>
+                <a:latin typeface="Consolas"/>
+                <a:cs typeface="Consolas"/>
+              </a:rPr>
+              <a:t>log.</a:t>
+            </a:r>
+            <a:r>
+              <a:rPr lang="en-US" sz="1400">
+                <a:solidFill>
+                  <a:srgbClr val="74531F"/>
+                </a:solidFill>
+                <a:latin typeface="Consolas"/>
+                <a:cs typeface="Consolas"/>
+              </a:rPr>
+              <a:t>Information</a:t>
+            </a:r>
+            <a:r>
+              <a:rPr lang="en-US" sz="1400">
+                <a:solidFill>
+                  <a:srgbClr val="1F1F1F"/>
+                </a:solidFill>
+                <a:latin typeface="Consolas"/>
+                <a:cs typeface="Consolas"/>
+              </a:rPr>
+              <a:t>(</a:t>
+            </a:r>
+            <a:r>
+              <a:rPr lang="en-US" sz="1400">
+                <a:solidFill>
+                  <a:srgbClr val="A31515"/>
+                </a:solidFill>
+                <a:latin typeface="Consolas"/>
+                <a:cs typeface="Consolas"/>
+              </a:rPr>
+              <a:t>"Got {userId}"</a:t>
+            </a:r>
+            <a:r>
+              <a:rPr lang="en-US" sz="1400">
+                <a:solidFill>
+                  <a:srgbClr val="1F1F1F"/>
+                </a:solidFill>
+                <a:latin typeface="Consolas"/>
+                <a:cs typeface="Consolas"/>
+              </a:rPr>
+              <a:t>, id);</a:t>
+            </a:r>
+            <a:endParaRPr lang="en-US" sz="1400">
+              <a:solidFill>
+                <a:srgbClr val="1F3A5F"/>
+              </a:solidFill>
+              <a:latin typeface="Consolas"/>
+              <a:cs typeface="Consolas"/>
+            </a:endParaRPr>
           </a:p>
         </p:txBody>
       </p:sp>
@@ -8932,8 +11771,65 @@
                 <a:cs typeface="Consolas"/>
               </a:rPr>
               <a:t>
-log.Information("Got {UserId}", id);</a:t>
-            </a:r>
+</a:t>
+            </a:r>
+            <a:r>
+              <a:rPr lang="en-US" sz="1400">
+                <a:solidFill>
+                  <a:srgbClr val="1F1F1F"/>
+                </a:solidFill>
+                <a:latin typeface="Consolas"/>
+                <a:cs typeface="Consolas"/>
+              </a:rPr>
+              <a:t>log.</a:t>
+            </a:r>
+            <a:r>
+              <a:rPr lang="en-US" sz="1400">
+                <a:solidFill>
+                  <a:srgbClr val="74531F"/>
+                </a:solidFill>
+                <a:latin typeface="Consolas"/>
+                <a:cs typeface="Consolas"/>
+              </a:rPr>
+              <a:t>Information</a:t>
+            </a:r>
+            <a:r>
+              <a:rPr lang="en-US" sz="1400">
+                <a:solidFill>
+                  <a:srgbClr val="1F1F1F"/>
+                </a:solidFill>
+                <a:latin typeface="Consolas"/>
+                <a:cs typeface="Consolas"/>
+              </a:rPr>
+              <a:t>(</a:t>
+            </a:r>
+            <a:r>
+              <a:rPr lang="en-US" sz="1400">
+                <a:solidFill>
+                  <a:srgbClr val="A31515"/>
+                </a:solidFill>
+                <a:latin typeface="Consolas"/>
+                <a:cs typeface="Consolas"/>
+              </a:rPr>
+              <a:t>"Got {UserId}"</a:t>
+            </a:r>
+            <a:r>
+              <a:rPr lang="en-US" sz="1400">
+                <a:solidFill>
+                  <a:srgbClr val="1F1F1F"/>
+                </a:solidFill>
+                <a:latin typeface="Consolas"/>
+                <a:cs typeface="Consolas"/>
+              </a:rPr>
+              <a:t>, id);</a:t>
+            </a:r>
+            <a:endParaRPr lang="en-US" sz="1400">
+              <a:solidFill>
+                <a:srgbClr val="1F3A5F"/>
+              </a:solidFill>
+              <a:latin typeface="Consolas"/>
+              <a:cs typeface="Consolas"/>
+            </a:endParaRPr>
           </a:p>
         </p:txBody>
       </p:sp>
@@ -9198,9 +12094,166 @@
                 <a:cs typeface="Consolas"/>
               </a:rPr>
               <a:t>
-[ProducesResponseType(200)]
-public IActionResult Get(int id) =&gt; NotFound();</a:t>
-            </a:r>
+</a:t>
+            </a:r>
+            <a:r>
+              <a:rPr lang="en-US" sz="1400">
+                <a:solidFill>
+                  <a:srgbClr val="1F1F1F"/>
+                </a:solidFill>
+                <a:latin typeface="Consolas"/>
+                <a:cs typeface="Consolas"/>
+              </a:rPr>
+              <a:t>[</a:t>
+            </a:r>
+            <a:r>
+              <a:rPr lang="en-US" sz="1400">
+                <a:solidFill>
+                  <a:srgbClr val="2B91AF"/>
+                </a:solidFill>
+                <a:latin typeface="Consolas"/>
+                <a:cs typeface="Consolas"/>
+              </a:rPr>
+              <a:t>ProducesResponseType</a:t>
+            </a:r>
+            <a:r>
+              <a:rPr lang="en-US" sz="1400">
+                <a:solidFill>
+                  <a:srgbClr val="1F1F1F"/>
+                </a:solidFill>
+                <a:latin typeface="Consolas"/>
+                <a:cs typeface="Consolas"/>
+              </a:rPr>
+              <a:t>(</a:t>
+            </a:r>
+            <a:r>
+              <a:rPr lang="en-US" sz="1400">
+                <a:solidFill>
+                  <a:srgbClr val="098658"/>
+                </a:solidFill>
+                <a:latin typeface="Consolas"/>
+                <a:cs typeface="Consolas"/>
+              </a:rPr>
+              <a:t>200</a:t>
+            </a:r>
+            <a:r>
+              <a:rPr lang="en-US" sz="1400">
+                <a:solidFill>
+                  <a:srgbClr val="1F1F1F"/>
+                </a:solidFill>
+                <a:latin typeface="Consolas"/>
+                <a:cs typeface="Consolas"/>
+              </a:rPr>
+              <a:t>)]
+</a:t>
+            </a:r>
+            <a:r>
+              <a:rPr lang="en-US" sz="1400">
+                <a:solidFill>
+                  <a:srgbClr val="0000FF"/>
+                </a:solidFill>
+                <a:latin typeface="Consolas"/>
+                <a:cs typeface="Consolas"/>
+              </a:rPr>
+              <a:t>public</a:t>
+            </a:r>
+            <a:r>
+              <a:rPr lang="en-US" sz="1400">
+                <a:solidFill>
+                  <a:srgbClr val="1F1F1F"/>
+                </a:solidFill>
+                <a:latin typeface="Consolas"/>
+                <a:cs typeface="Consolas"/>
+              </a:rPr>
+              <a:t> </a:t>
+            </a:r>
+            <a:r>
+              <a:rPr lang="en-US" sz="1400">
+                <a:solidFill>
+                  <a:srgbClr val="2B91AF"/>
+                </a:solidFill>
+                <a:latin typeface="Consolas"/>
+                <a:cs typeface="Consolas"/>
+              </a:rPr>
+              <a:t>IActionResult</a:t>
+            </a:r>
+            <a:r>
+              <a:rPr lang="en-US" sz="1400">
+                <a:solidFill>
+                  <a:srgbClr val="1F1F1F"/>
+                </a:solidFill>
+                <a:latin typeface="Consolas"/>
+                <a:cs typeface="Consolas"/>
+              </a:rPr>
+              <a:t> </a:t>
+            </a:r>
+            <a:r>
+              <a:rPr lang="en-US" sz="1400">
+                <a:solidFill>
+                  <a:srgbClr val="74531F"/>
+                </a:solidFill>
+                <a:latin typeface="Consolas"/>
+                <a:cs typeface="Consolas"/>
+              </a:rPr>
+              <a:t>Get</a:t>
+            </a:r>
+            <a:r>
+              <a:rPr lang="en-US" sz="1400">
+                <a:solidFill>
+                  <a:srgbClr val="1F1F1F"/>
+                </a:solidFill>
+                <a:latin typeface="Consolas"/>
+                <a:cs typeface="Consolas"/>
+              </a:rPr>
+              <a:t>(</a:t>
+            </a:r>
+            <a:r>
+              <a:rPr lang="en-US" sz="1400">
+                <a:solidFill>
+                  <a:srgbClr val="0000FF"/>
+                </a:solidFill>
+                <a:latin typeface="Consolas"/>
+                <a:cs typeface="Consolas"/>
+              </a:rPr>
+              <a:t>int</a:t>
+            </a:r>
+            <a:r>
+              <a:rPr lang="en-US" sz="1400">
+                <a:solidFill>
+                  <a:srgbClr val="1F1F1F"/>
+                </a:solidFill>
+                <a:latin typeface="Consolas"/>
+                <a:cs typeface="Consolas"/>
+              </a:rPr>
+              <a:t> id) =&gt; </a:t>
+            </a:r>
+            <a:r>
+              <a:rPr lang="en-US" sz="1400">
+                <a:solidFill>
+                  <a:srgbClr val="74531F"/>
+                </a:solidFill>
+                <a:latin typeface="Consolas"/>
+                <a:cs typeface="Consolas"/>
+              </a:rPr>
+              <a:t>NotFound</a:t>
+            </a:r>
+            <a:r>
+              <a:rPr lang="en-US" sz="1400">
+                <a:solidFill>
+                  <a:srgbClr val="1F1F1F"/>
+                </a:solidFill>
+                <a:latin typeface="Consolas"/>
+                <a:cs typeface="Consolas"/>
+              </a:rPr>
+              <a:t>();</a:t>
+            </a:r>
+            <a:endParaRPr lang="en-US" sz="1400">
+              <a:solidFill>
+                <a:srgbClr val="1F3A5F"/>
+              </a:solidFill>
+              <a:latin typeface="Consolas"/>
+              <a:cs typeface="Consolas"/>
+            </a:endParaRPr>
           </a:p>
         </p:txBody>
       </p:sp>
@@ -9298,10 +12351,207 @@
                 <a:cs typeface="Consolas"/>
               </a:rPr>
               <a:t>
-[ProducesResponseType(200)]
-[ProducesResponseType(404)]
-public IActionResult Get(int id) =&gt; NotFound();</a:t>
-            </a:r>
+</a:t>
+            </a:r>
+            <a:r>
+              <a:rPr lang="en-US" sz="1400">
+                <a:solidFill>
+                  <a:srgbClr val="1F1F1F"/>
+                </a:solidFill>
+                <a:latin typeface="Consolas"/>
+                <a:cs typeface="Consolas"/>
+              </a:rPr>
+              <a:t>[</a:t>
+            </a:r>
+            <a:r>
+              <a:rPr lang="en-US" sz="1400">
+                <a:solidFill>
+                  <a:srgbClr val="2B91AF"/>
+                </a:solidFill>
+                <a:latin typeface="Consolas"/>
+                <a:cs typeface="Consolas"/>
+              </a:rPr>
+              <a:t>ProducesResponseType</a:t>
+            </a:r>
+            <a:r>
+              <a:rPr lang="en-US" sz="1400">
+                <a:solidFill>
+                  <a:srgbClr val="1F1F1F"/>
+                </a:solidFill>
+                <a:latin typeface="Consolas"/>
+                <a:cs typeface="Consolas"/>
+              </a:rPr>
+              <a:t>(</a:t>
+            </a:r>
+            <a:r>
+              <a:rPr lang="en-US" sz="1400">
+                <a:solidFill>
+                  <a:srgbClr val="098658"/>
+                </a:solidFill>
+                <a:latin typeface="Consolas"/>
+                <a:cs typeface="Consolas"/>
+              </a:rPr>
+              <a:t>200</a:t>
+            </a:r>
+            <a:r>
+              <a:rPr lang="en-US" sz="1400">
+                <a:solidFill>
+                  <a:srgbClr val="1F1F1F"/>
+                </a:solidFill>
+                <a:latin typeface="Consolas"/>
+                <a:cs typeface="Consolas"/>
+              </a:rPr>
+              <a:t>)]
+[</a:t>
+            </a:r>
+            <a:r>
+              <a:rPr lang="en-US" sz="1400">
+                <a:solidFill>
+                  <a:srgbClr val="2B91AF"/>
+                </a:solidFill>
+                <a:latin typeface="Consolas"/>
+                <a:cs typeface="Consolas"/>
+              </a:rPr>
+              <a:t>ProducesResponseType</a:t>
+            </a:r>
+            <a:r>
+              <a:rPr lang="en-US" sz="1400">
+                <a:solidFill>
+                  <a:srgbClr val="1F1F1F"/>
+                </a:solidFill>
+                <a:latin typeface="Consolas"/>
+                <a:cs typeface="Consolas"/>
+              </a:rPr>
+              <a:t>(</a:t>
+            </a:r>
+            <a:r>
+              <a:rPr lang="en-US" sz="1400">
+                <a:solidFill>
+                  <a:srgbClr val="098658"/>
+                </a:solidFill>
+                <a:latin typeface="Consolas"/>
+                <a:cs typeface="Consolas"/>
+              </a:rPr>
+              <a:t>404</a:t>
+            </a:r>
+            <a:r>
+              <a:rPr lang="en-US" sz="1400">
+                <a:solidFill>
+                  <a:srgbClr val="1F1F1F"/>
+                </a:solidFill>
+                <a:latin typeface="Consolas"/>
+                <a:cs typeface="Consolas"/>
+              </a:rPr>
+              <a:t>)]
+</a:t>
+            </a:r>
+            <a:r>
+              <a:rPr lang="en-US" sz="1400">
+                <a:solidFill>
+                  <a:srgbClr val="0000FF"/>
+                </a:solidFill>
+                <a:latin typeface="Consolas"/>
+                <a:cs typeface="Consolas"/>
+              </a:rPr>
+              <a:t>public</a:t>
+            </a:r>
+            <a:r>
+              <a:rPr lang="en-US" sz="1400">
+                <a:solidFill>
+                  <a:srgbClr val="1F1F1F"/>
+                </a:solidFill>
+                <a:latin typeface="Consolas"/>
+                <a:cs typeface="Consolas"/>
+              </a:rPr>
+              <a:t> </a:t>
+            </a:r>
+            <a:r>
+              <a:rPr lang="en-US" sz="1400">
+                <a:solidFill>
+                  <a:srgbClr val="2B91AF"/>
+                </a:solidFill>
+                <a:latin typeface="Consolas"/>
+                <a:cs typeface="Consolas"/>
+              </a:rPr>
+              <a:t>IActionResult</a:t>
+            </a:r>
+            <a:r>
+              <a:rPr lang="en-US" sz="1400">
+                <a:solidFill>
+                  <a:srgbClr val="1F1F1F"/>
+                </a:solidFill>
+                <a:latin typeface="Consolas"/>
+                <a:cs typeface="Consolas"/>
+              </a:rPr>
+              <a:t> </a:t>
+            </a:r>
+            <a:r>
+              <a:rPr lang="en-US" sz="1400">
+                <a:solidFill>
+                  <a:srgbClr val="74531F"/>
+                </a:solidFill>
+                <a:latin typeface="Consolas"/>
+                <a:cs typeface="Consolas"/>
+              </a:rPr>
+              <a:t>Get</a:t>
+            </a:r>
+            <a:r>
+              <a:rPr lang="en-US" sz="1400">
+                <a:solidFill>
+                  <a:srgbClr val="1F1F1F"/>
+                </a:solidFill>
+                <a:latin typeface="Consolas"/>
+                <a:cs typeface="Consolas"/>
+              </a:rPr>
+              <a:t>(</a:t>
+            </a:r>
+            <a:r>
+              <a:rPr lang="en-US" sz="1400">
+                <a:solidFill>
+                  <a:srgbClr val="0000FF"/>
+                </a:solidFill>
+                <a:latin typeface="Consolas"/>
+                <a:cs typeface="Consolas"/>
+              </a:rPr>
+              <a:t>int</a:t>
+            </a:r>
+            <a:r>
+              <a:rPr lang="en-US" sz="1400">
+                <a:solidFill>
+                  <a:srgbClr val="1F1F1F"/>
+                </a:solidFill>
+                <a:latin typeface="Consolas"/>
+                <a:cs typeface="Consolas"/>
+              </a:rPr>
+              <a:t> id) =&gt; </a:t>
+            </a:r>
+            <a:r>
+              <a:rPr lang="en-US" sz="1400">
+                <a:solidFill>
+                  <a:srgbClr val="74531F"/>
+                </a:solidFill>
+                <a:latin typeface="Consolas"/>
+                <a:cs typeface="Consolas"/>
+              </a:rPr>
+              <a:t>NotFound</a:t>
+            </a:r>
+            <a:r>
+              <a:rPr lang="en-US" sz="1400">
+                <a:solidFill>
+                  <a:srgbClr val="1F1F1F"/>
+                </a:solidFill>
+                <a:latin typeface="Consolas"/>
+                <a:cs typeface="Consolas"/>
+              </a:rPr>
+              <a:t>();</a:t>
+            </a:r>
+            <a:endParaRPr lang="en-US" sz="1400">
+              <a:solidFill>
+                <a:srgbClr val="1F3A5F"/>
+              </a:solidFill>
+              <a:latin typeface="Consolas"/>
+              <a:cs typeface="Consolas"/>
+            </a:endParaRPr>
           </a:p>
         </p:txBody>
       </p:sp>
@@ -9566,9 +12816,216 @@
                 <a:cs typeface="Consolas"/>
               </a:rPr>
               <a:t>
-var result = new List&lt;int&gt;();
-foreach (var n in nums) if (n &gt; 0) result.Add(n);</a:t>
-            </a:r>
+</a:t>
+            </a:r>
+            <a:r>
+              <a:rPr lang="en-US" sz="1400">
+                <a:solidFill>
+                  <a:srgbClr val="0000FF"/>
+                </a:solidFill>
+                <a:latin typeface="Consolas"/>
+                <a:cs typeface="Consolas"/>
+              </a:rPr>
+              <a:t>var</a:t>
+            </a:r>
+            <a:r>
+              <a:rPr lang="en-US" sz="1400">
+                <a:solidFill>
+                  <a:srgbClr val="1F1F1F"/>
+                </a:solidFill>
+                <a:latin typeface="Consolas"/>
+                <a:cs typeface="Consolas"/>
+              </a:rPr>
+              <a:t> result = </a:t>
+            </a:r>
+            <a:r>
+              <a:rPr lang="en-US" sz="1400">
+                <a:solidFill>
+                  <a:srgbClr val="0000FF"/>
+                </a:solidFill>
+                <a:latin typeface="Consolas"/>
+                <a:cs typeface="Consolas"/>
+              </a:rPr>
+              <a:t>new</a:t>
+            </a:r>
+            <a:r>
+              <a:rPr lang="en-US" sz="1400">
+                <a:solidFill>
+                  <a:srgbClr val="1F1F1F"/>
+                </a:solidFill>
+                <a:latin typeface="Consolas"/>
+                <a:cs typeface="Consolas"/>
+              </a:rPr>
+              <a:t> </a:t>
+            </a:r>
+            <a:r>
+              <a:rPr lang="en-US" sz="1400">
+                <a:solidFill>
+                  <a:srgbClr val="2B91AF"/>
+                </a:solidFill>
+                <a:latin typeface="Consolas"/>
+                <a:cs typeface="Consolas"/>
+              </a:rPr>
+              <a:t>List</a:t>
+            </a:r>
+            <a:r>
+              <a:rPr lang="en-US" sz="1400">
+                <a:solidFill>
+                  <a:srgbClr val="1F1F1F"/>
+                </a:solidFill>
+                <a:latin typeface="Consolas"/>
+                <a:cs typeface="Consolas"/>
+              </a:rPr>
+              <a:t>&lt;</a:t>
+            </a:r>
+            <a:r>
+              <a:rPr lang="en-US" sz="1400">
+                <a:solidFill>
+                  <a:srgbClr val="0000FF"/>
+                </a:solidFill>
+                <a:latin typeface="Consolas"/>
+                <a:cs typeface="Consolas"/>
+              </a:rPr>
+              <a:t>int</a:t>
+            </a:r>
+            <a:r>
+              <a:rPr lang="en-US" sz="1400">
+                <a:solidFill>
+                  <a:srgbClr val="1F1F1F"/>
+                </a:solidFill>
+                <a:latin typeface="Consolas"/>
+                <a:cs typeface="Consolas"/>
+              </a:rPr>
+              <a:t>&gt;();
+</a:t>
+            </a:r>
+            <a:r>
+              <a:rPr lang="en-US" sz="1400">
+                <a:solidFill>
+                  <a:srgbClr val="8F08C4"/>
+                </a:solidFill>
+                <a:latin typeface="Consolas"/>
+                <a:cs typeface="Consolas"/>
+              </a:rPr>
+              <a:t>foreach</a:t>
+            </a:r>
+            <a:r>
+              <a:rPr lang="en-US" sz="1400">
+                <a:solidFill>
+                  <a:srgbClr val="1F1F1F"/>
+                </a:solidFill>
+                <a:latin typeface="Consolas"/>
+                <a:cs typeface="Consolas"/>
+              </a:rPr>
+              <a:t> (</a:t>
+            </a:r>
+            <a:r>
+              <a:rPr lang="en-US" sz="1400">
+                <a:solidFill>
+                  <a:srgbClr val="0000FF"/>
+                </a:solidFill>
+                <a:latin typeface="Consolas"/>
+                <a:cs typeface="Consolas"/>
+              </a:rPr>
+              <a:t>var</a:t>
+            </a:r>
+            <a:r>
+              <a:rPr lang="en-US" sz="1400">
+                <a:solidFill>
+                  <a:srgbClr val="1F1F1F"/>
+                </a:solidFill>
+                <a:latin typeface="Consolas"/>
+                <a:cs typeface="Consolas"/>
+              </a:rPr>
+              <a:t> n </a:t>
+            </a:r>
+            <a:r>
+              <a:rPr lang="en-US" sz="1400">
+                <a:solidFill>
+                  <a:srgbClr val="8F08C4"/>
+                </a:solidFill>
+                <a:latin typeface="Consolas"/>
+                <a:cs typeface="Consolas"/>
+              </a:rPr>
+              <a:t>in</a:t>
+            </a:r>
+            <a:r>
+              <a:rPr lang="en-US" sz="1400">
+                <a:solidFill>
+                  <a:srgbClr val="1F1F1F"/>
+                </a:solidFill>
+                <a:latin typeface="Consolas"/>
+                <a:cs typeface="Consolas"/>
+              </a:rPr>
+              <a:t> nums) </a:t>
+            </a:r>
+            <a:r>
+              <a:rPr lang="en-US" sz="1400">
+                <a:solidFill>
+                  <a:srgbClr val="8F08C4"/>
+                </a:solidFill>
+                <a:latin typeface="Consolas"/>
+                <a:cs typeface="Consolas"/>
+              </a:rPr>
+              <a:t>if</a:t>
+            </a:r>
+            <a:r>
+              <a:rPr lang="en-US" sz="1400">
+                <a:solidFill>
+                  <a:srgbClr val="1F1F1F"/>
+                </a:solidFill>
+                <a:latin typeface="Consolas"/>
+                <a:cs typeface="Consolas"/>
+              </a:rPr>
+              <a:t> (n &gt; </a:t>
+            </a:r>
+            <a:r>
+              <a:rPr lang="en-US" sz="1400">
+                <a:solidFill>
+                  <a:srgbClr val="098658"/>
+                </a:solidFill>
+                <a:latin typeface="Consolas"/>
+                <a:cs typeface="Consolas"/>
+              </a:rPr>
+              <a:t>0</a:t>
+            </a:r>
+            <a:r>
+              <a:rPr lang="en-US" sz="1400">
+                <a:solidFill>
+                  <a:srgbClr val="1F1F1F"/>
+                </a:solidFill>
+                <a:latin typeface="Consolas"/>
+                <a:cs typeface="Consolas"/>
+              </a:rPr>
+              <a:t>) result.</a:t>
+            </a:r>
+            <a:r>
+              <a:rPr lang="en-US" sz="1400">
+                <a:solidFill>
+                  <a:srgbClr val="74531F"/>
+                </a:solidFill>
+                <a:latin typeface="Consolas"/>
+                <a:cs typeface="Consolas"/>
+              </a:rPr>
+              <a:t>Add</a:t>
+            </a:r>
+            <a:r>
+              <a:rPr lang="en-US" sz="1400">
+                <a:solidFill>
+                  <a:srgbClr val="1F1F1F"/>
+                </a:solidFill>
+                <a:latin typeface="Consolas"/>
+                <a:cs typeface="Consolas"/>
+              </a:rPr>
+              <a:t>(n);</a:t>
+            </a:r>
+            <a:endParaRPr lang="en-US" sz="1400">
+              <a:solidFill>
+                <a:srgbClr val="1F3A5F"/>
+              </a:solidFill>
+              <a:latin typeface="Consolas"/>
+              <a:cs typeface="Consolas"/>
+            </a:endParaRPr>
           </a:p>
         </p:txBody>
       </p:sp>
@@ -9666,8 +13123,95 @@
                 <a:cs typeface="Consolas"/>
               </a:rPr>
               <a:t>
-var result = nums.Where(n =&gt; n &gt; 0).ToList();</a:t>
-            </a:r>
+</a:t>
+            </a:r>
+            <a:r>
+              <a:rPr lang="en-US" sz="1400">
+                <a:solidFill>
+                  <a:srgbClr val="0000FF"/>
+                </a:solidFill>
+                <a:latin typeface="Consolas"/>
+                <a:cs typeface="Consolas"/>
+              </a:rPr>
+              <a:t>var</a:t>
+            </a:r>
+            <a:r>
+              <a:rPr lang="en-US" sz="1400">
+                <a:solidFill>
+                  <a:srgbClr val="1F1F1F"/>
+                </a:solidFill>
+                <a:latin typeface="Consolas"/>
+                <a:cs typeface="Consolas"/>
+              </a:rPr>
+              <a:t> result = nums.</a:t>
+            </a:r>
+            <a:r>
+              <a:rPr lang="en-US" sz="1400">
+                <a:solidFill>
+                  <a:srgbClr val="74531F"/>
+                </a:solidFill>
+                <a:latin typeface="Consolas"/>
+                <a:cs typeface="Consolas"/>
+              </a:rPr>
+              <a:t>Where</a:t>
+            </a:r>
+            <a:r>
+              <a:rPr lang="en-US" sz="1400">
+                <a:solidFill>
+                  <a:srgbClr val="1F1F1F"/>
+                </a:solidFill>
+                <a:latin typeface="Consolas"/>
+                <a:cs typeface="Consolas"/>
+              </a:rPr>
+              <a:t>(n =&gt; n &gt; </a:t>
+            </a:r>
+            <a:r>
+              <a:rPr lang="en-US" sz="1400">
+                <a:solidFill>
+                  <a:srgbClr val="098658"/>
+                </a:solidFill>
+                <a:latin typeface="Consolas"/>
+                <a:cs typeface="Consolas"/>
+              </a:rPr>
+              <a:t>0</a:t>
+            </a:r>
+            <a:r>
+              <a:rPr lang="en-US" sz="1400">
+                <a:solidFill>
+                  <a:srgbClr val="1F1F1F"/>
+                </a:solidFill>
+                <a:latin typeface="Consolas"/>
+                <a:cs typeface="Consolas"/>
+              </a:rPr>
+              <a:t>).</a:t>
+            </a:r>
+            <a:r>
+              <a:rPr lang="en-US" sz="1400">
+                <a:solidFill>
+                  <a:srgbClr val="74531F"/>
+                </a:solidFill>
+                <a:latin typeface="Consolas"/>
+                <a:cs typeface="Consolas"/>
+              </a:rPr>
+              <a:t>ToList</a:t>
+            </a:r>
+            <a:r>
+              <a:rPr lang="en-US" sz="1400">
+                <a:solidFill>
+                  <a:srgbClr val="1F1F1F"/>
+                </a:solidFill>
+                <a:latin typeface="Consolas"/>
+                <a:cs typeface="Consolas"/>
+              </a:rPr>
+              <a:t>();</a:t>
+            </a:r>
+            <a:endParaRPr lang="en-US" sz="1400">
+              <a:solidFill>
+                <a:srgbClr val="1F3A5F"/>
+              </a:solidFill>
+              <a:latin typeface="Consolas"/>
+              <a:cs typeface="Consolas"/>
+            </a:endParaRPr>
           </a:p>
         </p:txBody>
       </p:sp>
@@ -9932,9 +13476,176 @@
                 <a:cs typeface="Consolas"/>
               </a:rPr>
               <a:t>
-namespace Orders  { class Order   { Billing.Invoice I; } }
-namespace Billing { class Invoice { Orders.Order O; } }</a:t>
-            </a:r>
+</a:t>
+            </a:r>
+            <a:r>
+              <a:rPr lang="en-US" sz="1400">
+                <a:solidFill>
+                  <a:srgbClr val="0000FF"/>
+                </a:solidFill>
+                <a:latin typeface="Consolas"/>
+                <a:cs typeface="Consolas"/>
+              </a:rPr>
+              <a:t>namespace</a:t>
+            </a:r>
+            <a:r>
+              <a:rPr lang="en-US" sz="1400">
+                <a:solidFill>
+                  <a:srgbClr val="1F1F1F"/>
+                </a:solidFill>
+                <a:latin typeface="Consolas"/>
+                <a:cs typeface="Consolas"/>
+              </a:rPr>
+              <a:t> Orders  { </a:t>
+            </a:r>
+            <a:r>
+              <a:rPr lang="en-US" sz="1400">
+                <a:solidFill>
+                  <a:srgbClr val="0000FF"/>
+                </a:solidFill>
+                <a:latin typeface="Consolas"/>
+                <a:cs typeface="Consolas"/>
+              </a:rPr>
+              <a:t>class</a:t>
+            </a:r>
+            <a:r>
+              <a:rPr lang="en-US" sz="1400">
+                <a:solidFill>
+                  <a:srgbClr val="1F1F1F"/>
+                </a:solidFill>
+                <a:latin typeface="Consolas"/>
+                <a:cs typeface="Consolas"/>
+              </a:rPr>
+              <a:t> </a:t>
+            </a:r>
+            <a:r>
+              <a:rPr lang="en-US" sz="1400">
+                <a:solidFill>
+                  <a:srgbClr val="2B91AF"/>
+                </a:solidFill>
+                <a:latin typeface="Consolas"/>
+                <a:cs typeface="Consolas"/>
+              </a:rPr>
+              <a:t>Order</a:t>
+            </a:r>
+            <a:r>
+              <a:rPr lang="en-US" sz="1400">
+                <a:solidFill>
+                  <a:srgbClr val="1F1F1F"/>
+                </a:solidFill>
+                <a:latin typeface="Consolas"/>
+                <a:cs typeface="Consolas"/>
+              </a:rPr>
+              <a:t>   { Billing.</a:t>
+            </a:r>
+            <a:r>
+              <a:rPr lang="en-US" sz="1400">
+                <a:solidFill>
+                  <a:srgbClr val="2B91AF"/>
+                </a:solidFill>
+                <a:latin typeface="Consolas"/>
+                <a:cs typeface="Consolas"/>
+              </a:rPr>
+              <a:t>Invoice</a:t>
+            </a:r>
+            <a:r>
+              <a:rPr lang="en-US" sz="1400">
+                <a:solidFill>
+                  <a:srgbClr val="1F1F1F"/>
+                </a:solidFill>
+                <a:latin typeface="Consolas"/>
+                <a:cs typeface="Consolas"/>
+              </a:rPr>
+              <a:t> I; } }
+</a:t>
+            </a:r>
+            <a:r>
+              <a:rPr lang="en-US" sz="1400">
+                <a:solidFill>
+                  <a:srgbClr val="0000FF"/>
+                </a:solidFill>
+                <a:latin typeface="Consolas"/>
+                <a:cs typeface="Consolas"/>
+              </a:rPr>
+              <a:t>namespace</a:t>
+            </a:r>
+            <a:r>
+              <a:rPr lang="en-US" sz="1400">
+                <a:solidFill>
+                  <a:srgbClr val="1F1F1F"/>
+                </a:solidFill>
+                <a:latin typeface="Consolas"/>
+                <a:cs typeface="Consolas"/>
+              </a:rPr>
+              <a:t> Billing { </a:t>
+            </a:r>
+            <a:r>
+              <a:rPr lang="en-US" sz="1400">
+                <a:solidFill>
+                  <a:srgbClr val="0000FF"/>
+                </a:solidFill>
+                <a:latin typeface="Consolas"/>
+                <a:cs typeface="Consolas"/>
+              </a:rPr>
+              <a:t>class</a:t>
+            </a:r>
+            <a:r>
+              <a:rPr lang="en-US" sz="1400">
+                <a:solidFill>
+                  <a:srgbClr val="1F1F1F"/>
+                </a:solidFill>
+                <a:latin typeface="Consolas"/>
+                <a:cs typeface="Consolas"/>
+              </a:rPr>
+              <a:t> </a:t>
+            </a:r>
+            <a:r>
+              <a:rPr lang="en-US" sz="1400">
+                <a:solidFill>
+                  <a:srgbClr val="2B91AF"/>
+                </a:solidFill>
+                <a:latin typeface="Consolas"/>
+                <a:cs typeface="Consolas"/>
+              </a:rPr>
+              <a:t>Invoice</a:t>
+            </a:r>
+            <a:r>
+              <a:rPr lang="en-US" sz="1400">
+                <a:solidFill>
+                  <a:srgbClr val="1F1F1F"/>
+                </a:solidFill>
+                <a:latin typeface="Consolas"/>
+                <a:cs typeface="Consolas"/>
+              </a:rPr>
+              <a:t> { Orders.</a:t>
+            </a:r>
+            <a:r>
+              <a:rPr lang="en-US" sz="1400">
+                <a:solidFill>
+                  <a:srgbClr val="2B91AF"/>
+                </a:solidFill>
+                <a:latin typeface="Consolas"/>
+                <a:cs typeface="Consolas"/>
+              </a:rPr>
+              <a:t>Order</a:t>
+            </a:r>
+            <a:r>
+              <a:rPr lang="en-US" sz="1400">
+                <a:solidFill>
+                  <a:srgbClr val="1F1F1F"/>
+                </a:solidFill>
+                <a:latin typeface="Consolas"/>
+                <a:cs typeface="Consolas"/>
+              </a:rPr>
+              <a:t> O; } }</a:t>
+            </a:r>
+            <a:endParaRPr lang="en-US" sz="1400">
+              <a:solidFill>
+                <a:srgbClr val="1F3A5F"/>
+              </a:solidFill>
+              <a:latin typeface="Consolas"/>
+              <a:cs typeface="Consolas"/>
+            </a:endParaRPr>
           </a:p>
         </p:txBody>
       </p:sp>
@@ -10032,10 +13743,317 @@
                 <a:cs typeface="Consolas"/>
               </a:rPr>
               <a:t>
-namespace Contracts { interface IOrder { } interface IInvoice { } }
-namespace Orders    { class Order   : IOrder   { IInvoice I; } }
-namespace Billing   { class Invoice : IInvoice { IOrder O; } }</a:t>
-            </a:r>
+</a:t>
+            </a:r>
+            <a:r>
+              <a:rPr lang="en-US" sz="1400">
+                <a:solidFill>
+                  <a:srgbClr val="0000FF"/>
+                </a:solidFill>
+                <a:latin typeface="Consolas"/>
+                <a:cs typeface="Consolas"/>
+              </a:rPr>
+              <a:t>namespace</a:t>
+            </a:r>
+            <a:r>
+              <a:rPr lang="en-US" sz="1400">
+                <a:solidFill>
+                  <a:srgbClr val="1F1F1F"/>
+                </a:solidFill>
+                <a:latin typeface="Consolas"/>
+                <a:cs typeface="Consolas"/>
+              </a:rPr>
+              <a:t> Contracts { </a:t>
+            </a:r>
+            <a:r>
+              <a:rPr lang="en-US" sz="1400">
+                <a:solidFill>
+                  <a:srgbClr val="0000FF"/>
+                </a:solidFill>
+                <a:latin typeface="Consolas"/>
+                <a:cs typeface="Consolas"/>
+              </a:rPr>
+              <a:t>interface</a:t>
+            </a:r>
+            <a:r>
+              <a:rPr lang="en-US" sz="1400">
+                <a:solidFill>
+                  <a:srgbClr val="1F1F1F"/>
+                </a:solidFill>
+                <a:latin typeface="Consolas"/>
+                <a:cs typeface="Consolas"/>
+              </a:rPr>
+              <a:t> </a:t>
+            </a:r>
+            <a:r>
+              <a:rPr lang="en-US" sz="1400">
+                <a:solidFill>
+                  <a:srgbClr val="2B91AF"/>
+                </a:solidFill>
+                <a:latin typeface="Consolas"/>
+                <a:cs typeface="Consolas"/>
+              </a:rPr>
+              <a:t>IOrder</a:t>
+            </a:r>
+            <a:r>
+              <a:rPr lang="en-US" sz="1400">
+                <a:solidFill>
+                  <a:srgbClr val="1F1F1F"/>
+                </a:solidFill>
+                <a:latin typeface="Consolas"/>
+                <a:cs typeface="Consolas"/>
+              </a:rPr>
+              <a:t> { } </a:t>
+            </a:r>
+            <a:r>
+              <a:rPr lang="en-US" sz="1400">
+                <a:solidFill>
+                  <a:srgbClr val="0000FF"/>
+                </a:solidFill>
+                <a:latin typeface="Consolas"/>
+                <a:cs typeface="Consolas"/>
+              </a:rPr>
+              <a:t>interface</a:t>
+            </a:r>
+            <a:r>
+              <a:rPr lang="en-US" sz="1400">
+                <a:solidFill>
+                  <a:srgbClr val="1F1F1F"/>
+                </a:solidFill>
+                <a:latin typeface="Consolas"/>
+                <a:cs typeface="Consolas"/>
+              </a:rPr>
+              <a:t> </a:t>
+            </a:r>
+            <a:r>
+              <a:rPr lang="en-US" sz="1400">
+                <a:solidFill>
+                  <a:srgbClr val="2B91AF"/>
+                </a:solidFill>
+                <a:latin typeface="Consolas"/>
+                <a:cs typeface="Consolas"/>
+              </a:rPr>
+              <a:t>IInvoice</a:t>
+            </a:r>
+            <a:r>
+              <a:rPr lang="en-US" sz="1400">
+                <a:solidFill>
+                  <a:srgbClr val="1F1F1F"/>
+                </a:solidFill>
+                <a:latin typeface="Consolas"/>
+                <a:cs typeface="Consolas"/>
+              </a:rPr>
+              <a:t> { } }
+</a:t>
+            </a:r>
+            <a:r>
+              <a:rPr lang="en-US" sz="1400">
+                <a:solidFill>
+                  <a:srgbClr val="0000FF"/>
+                </a:solidFill>
+                <a:latin typeface="Consolas"/>
+                <a:cs typeface="Consolas"/>
+              </a:rPr>
+              <a:t>namespace</a:t>
+            </a:r>
+            <a:r>
+              <a:rPr lang="en-US" sz="1400">
+                <a:solidFill>
+                  <a:srgbClr val="1F1F1F"/>
+                </a:solidFill>
+                <a:latin typeface="Consolas"/>
+                <a:cs typeface="Consolas"/>
+              </a:rPr>
+              <a:t> Orders    { </a:t>
+            </a:r>
+            <a:r>
+              <a:rPr lang="en-US" sz="1400">
+                <a:solidFill>
+                  <a:srgbClr val="0000FF"/>
+                </a:solidFill>
+                <a:latin typeface="Consolas"/>
+                <a:cs typeface="Consolas"/>
+              </a:rPr>
+              <a:t>class</a:t>
+            </a:r>
+            <a:r>
+              <a:rPr lang="en-US" sz="1400">
+                <a:solidFill>
+                  <a:srgbClr val="1F1F1F"/>
+                </a:solidFill>
+                <a:latin typeface="Consolas"/>
+                <a:cs typeface="Consolas"/>
+              </a:rPr>
+              <a:t> </a:t>
+            </a:r>
+            <a:r>
+              <a:rPr lang="en-US" sz="1400">
+                <a:solidFill>
+                  <a:srgbClr val="2B91AF"/>
+                </a:solidFill>
+                <a:latin typeface="Consolas"/>
+                <a:cs typeface="Consolas"/>
+              </a:rPr>
+              <a:t>Order</a:t>
+            </a:r>
+            <a:r>
+              <a:rPr lang="en-US" sz="1400">
+                <a:solidFill>
+                  <a:srgbClr val="1F1F1F"/>
+                </a:solidFill>
+                <a:latin typeface="Consolas"/>
+                <a:cs typeface="Consolas"/>
+              </a:rPr>
+              <a:t>   : </a:t>
+            </a:r>
+            <a:r>
+              <a:rPr lang="en-US" sz="1400">
+                <a:solidFill>
+                  <a:srgbClr val="2B91AF"/>
+                </a:solidFill>
+                <a:latin typeface="Consolas"/>
+                <a:cs typeface="Consolas"/>
+              </a:rPr>
+              <a:t>IOrder</a:t>
+            </a:r>
+            <a:r>
+              <a:rPr lang="en-US" sz="1400">
+                <a:solidFill>
+                  <a:srgbClr val="1F1F1F"/>
+                </a:solidFill>
+                <a:latin typeface="Consolas"/>
+                <a:cs typeface="Consolas"/>
+              </a:rPr>
+              <a:t>   { </a:t>
+            </a:r>
+            <a:r>
+              <a:rPr lang="en-US" sz="1400">
+                <a:solidFill>
+                  <a:srgbClr val="2B91AF"/>
+                </a:solidFill>
+                <a:latin typeface="Consolas"/>
+                <a:cs typeface="Consolas"/>
+              </a:rPr>
+              <a:t>IInvoice</a:t>
+            </a:r>
+            <a:r>
+              <a:rPr lang="en-US" sz="1400">
+                <a:solidFill>
+                  <a:srgbClr val="1F1F1F"/>
+                </a:solidFill>
+                <a:latin typeface="Consolas"/>
+                <a:cs typeface="Consolas"/>
+              </a:rPr>
+              <a:t> I; } }
+</a:t>
+            </a:r>
+            <a:r>
+              <a:rPr lang="en-US" sz="1400">
+                <a:solidFill>
+                  <a:srgbClr val="0000FF"/>
+                </a:solidFill>
+                <a:latin typeface="Consolas"/>
+                <a:cs typeface="Consolas"/>
+              </a:rPr>
+              <a:t>namespace</a:t>
+            </a:r>
+            <a:r>
+              <a:rPr lang="en-US" sz="1400">
+                <a:solidFill>
+                  <a:srgbClr val="1F1F1F"/>
+                </a:solidFill>
+                <a:latin typeface="Consolas"/>
+                <a:cs typeface="Consolas"/>
+              </a:rPr>
+              <a:t> Billing   { </a:t>
+            </a:r>
+            <a:r>
+              <a:rPr lang="en-US" sz="1400">
+                <a:solidFill>
+                  <a:srgbClr val="0000FF"/>
+                </a:solidFill>
+                <a:latin typeface="Consolas"/>
+                <a:cs typeface="Consolas"/>
+              </a:rPr>
+              <a:t>class</a:t>
+            </a:r>
+            <a:r>
+              <a:rPr lang="en-US" sz="1400">
+                <a:solidFill>
+                  <a:srgbClr val="1F1F1F"/>
+                </a:solidFill>
+                <a:latin typeface="Consolas"/>
+                <a:cs typeface="Consolas"/>
+              </a:rPr>
+              <a:t> </a:t>
+            </a:r>
+            <a:r>
+              <a:rPr lang="en-US" sz="1400">
+                <a:solidFill>
+                  <a:srgbClr val="2B91AF"/>
+                </a:solidFill>
+                <a:latin typeface="Consolas"/>
+                <a:cs typeface="Consolas"/>
+              </a:rPr>
+              <a:t>Invoice</a:t>
+            </a:r>
+            <a:r>
+              <a:rPr lang="en-US" sz="1400">
+                <a:solidFill>
+                  <a:srgbClr val="1F1F1F"/>
+                </a:solidFill>
+                <a:latin typeface="Consolas"/>
+                <a:cs typeface="Consolas"/>
+              </a:rPr>
+              <a:t> : </a:t>
+            </a:r>
+            <a:r>
+              <a:rPr lang="en-US" sz="1400">
+                <a:solidFill>
+                  <a:srgbClr val="2B91AF"/>
+                </a:solidFill>
+                <a:latin typeface="Consolas"/>
+                <a:cs typeface="Consolas"/>
+              </a:rPr>
+              <a:t>IInvoice</a:t>
+            </a:r>
+            <a:r>
+              <a:rPr lang="en-US" sz="1400">
+                <a:solidFill>
+                  <a:srgbClr val="1F1F1F"/>
+                </a:solidFill>
+                <a:latin typeface="Consolas"/>
+                <a:cs typeface="Consolas"/>
+              </a:rPr>
+              <a:t> { </a:t>
+            </a:r>
+            <a:r>
+              <a:rPr lang="en-US" sz="1400">
+                <a:solidFill>
+                  <a:srgbClr val="2B91AF"/>
+                </a:solidFill>
+                <a:latin typeface="Consolas"/>
+                <a:cs typeface="Consolas"/>
+              </a:rPr>
+              <a:t>IOrder</a:t>
+            </a:r>
+            <a:r>
+              <a:rPr lang="en-US" sz="1400">
+                <a:solidFill>
+                  <a:srgbClr val="1F1F1F"/>
+                </a:solidFill>
+                <a:latin typeface="Consolas"/>
+                <a:cs typeface="Consolas"/>
+              </a:rPr>
+              <a:t> O; } }</a:t>
+            </a:r>
+            <a:endParaRPr lang="en-US" sz="1400">
+              <a:solidFill>
+                <a:srgbClr val="1F3A5F"/>
+              </a:solidFill>
+              <a:latin typeface="Consolas"/>
+              <a:cs typeface="Consolas"/>
+            </a:endParaRPr>
           </a:p>
         </p:txBody>
       </p:sp>
@@ -11879,12 +15897,179 @@
                 <a:cs typeface="Consolas"/>
               </a:rPr>
               <a:t>
-public class Orders
+</a:t>
+            </a:r>
+            <a:r>
+              <a:rPr lang="en-US" sz="1400">
+                <a:solidFill>
+                  <a:srgbClr val="0000FF"/>
+                </a:solidFill>
+                <a:latin typeface="Consolas"/>
+                <a:cs typeface="Consolas"/>
+              </a:rPr>
+              <a:t>public</a:t>
+            </a:r>
+            <a:r>
+              <a:rPr lang="en-US" sz="1400">
+                <a:solidFill>
+                  <a:srgbClr val="1F1F1F"/>
+                </a:solidFill>
+                <a:latin typeface="Consolas"/>
+                <a:cs typeface="Consolas"/>
+              </a:rPr>
+              <a:t> </a:t>
+            </a:r>
+            <a:r>
+              <a:rPr lang="en-US" sz="1400">
+                <a:solidFill>
+                  <a:srgbClr val="0000FF"/>
+                </a:solidFill>
+                <a:latin typeface="Consolas"/>
+                <a:cs typeface="Consolas"/>
+              </a:rPr>
+              <a:t>class</a:t>
+            </a:r>
+            <a:r>
+              <a:rPr lang="en-US" sz="1400">
+                <a:solidFill>
+                  <a:srgbClr val="1F1F1F"/>
+                </a:solidFill>
+                <a:latin typeface="Consolas"/>
+                <a:cs typeface="Consolas"/>
+              </a:rPr>
+              <a:t> </a:t>
+            </a:r>
+            <a:r>
+              <a:rPr lang="en-US" sz="1400">
+                <a:solidFill>
+                  <a:srgbClr val="2B91AF"/>
+                </a:solidFill>
+                <a:latin typeface="Consolas"/>
+                <a:cs typeface="Consolas"/>
+              </a:rPr>
+              <a:t>Orders</a:t>
+            </a:r>
+            <a:r>
+              <a:rPr lang="en-US" sz="1400">
+                <a:solidFill>
+                  <a:srgbClr val="1F1F1F"/>
+                </a:solidFill>
+                <a:latin typeface="Consolas"/>
+                <a:cs typeface="Consolas"/>
+              </a:rPr>
+              <a:t>
 {
-    [Function("GetOrder")]
-    public Task Run(...) { ... }
+    [</a:t>
+            </a:r>
+            <a:r>
+              <a:rPr lang="en-US" sz="1400">
+                <a:solidFill>
+                  <a:srgbClr val="2B91AF"/>
+                </a:solidFill>
+                <a:latin typeface="Consolas"/>
+                <a:cs typeface="Consolas"/>
+              </a:rPr>
+              <a:t>Function</a:t>
+            </a:r>
+            <a:r>
+              <a:rPr lang="en-US" sz="1400">
+                <a:solidFill>
+                  <a:srgbClr val="1F1F1F"/>
+                </a:solidFill>
+                <a:latin typeface="Consolas"/>
+                <a:cs typeface="Consolas"/>
+              </a:rPr>
+              <a:t>(</a:t>
+            </a:r>
+            <a:r>
+              <a:rPr lang="en-US" sz="1400">
+                <a:solidFill>
+                  <a:srgbClr val="A31515"/>
+                </a:solidFill>
+                <a:latin typeface="Consolas"/>
+                <a:cs typeface="Consolas"/>
+              </a:rPr>
+              <a:t>"GetOrder"</a:t>
+            </a:r>
+            <a:r>
+              <a:rPr lang="en-US" sz="1400">
+                <a:solidFill>
+                  <a:srgbClr val="1F1F1F"/>
+                </a:solidFill>
+                <a:latin typeface="Consolas"/>
+                <a:cs typeface="Consolas"/>
+              </a:rPr>
+              <a:t>)]
+    </a:t>
+            </a:r>
+            <a:r>
+              <a:rPr lang="en-US" sz="1400">
+                <a:solidFill>
+                  <a:srgbClr val="0000FF"/>
+                </a:solidFill>
+                <a:latin typeface="Consolas"/>
+                <a:cs typeface="Consolas"/>
+              </a:rPr>
+              <a:t>public</a:t>
+            </a:r>
+            <a:r>
+              <a:rPr lang="en-US" sz="1400">
+                <a:solidFill>
+                  <a:srgbClr val="1F1F1F"/>
+                </a:solidFill>
+                <a:latin typeface="Consolas"/>
+                <a:cs typeface="Consolas"/>
+              </a:rPr>
+              <a:t> </a:t>
+            </a:r>
+            <a:r>
+              <a:rPr lang="en-US" sz="1400">
+                <a:solidFill>
+                  <a:srgbClr val="2B91AF"/>
+                </a:solidFill>
+                <a:latin typeface="Consolas"/>
+                <a:cs typeface="Consolas"/>
+              </a:rPr>
+              <a:t>Task</a:t>
+            </a:r>
+            <a:r>
+              <a:rPr lang="en-US" sz="1400">
+                <a:solidFill>
+                  <a:srgbClr val="1F1F1F"/>
+                </a:solidFill>
+                <a:latin typeface="Consolas"/>
+                <a:cs typeface="Consolas"/>
+              </a:rPr>
+              <a:t> </a:t>
+            </a:r>
+            <a:r>
+              <a:rPr lang="en-US" sz="1400">
+                <a:solidFill>
+                  <a:srgbClr val="74531F"/>
+                </a:solidFill>
+                <a:latin typeface="Consolas"/>
+                <a:cs typeface="Consolas"/>
+              </a:rPr>
+              <a:t>Run</a:t>
+            </a:r>
+            <a:r>
+              <a:rPr lang="en-US" sz="1400">
+                <a:solidFill>
+                  <a:srgbClr val="1F1F1F"/>
+                </a:solidFill>
+                <a:latin typeface="Consolas"/>
+                <a:cs typeface="Consolas"/>
+              </a:rPr>
+              <a:t>(...) { ... }
 }</a:t>
             </a:r>
+            <a:endParaRPr lang="en-US" sz="1400">
+              <a:solidFill>
+                <a:srgbClr val="1F3A5F"/>
+              </a:solidFill>
+              <a:latin typeface="Consolas"/>
+              <a:cs typeface="Consolas"/>
+            </a:endParaRPr>
           </a:p>
         </p:txBody>
       </p:sp>
@@ -11982,12 +16167,179 @@
                 <a:cs typeface="Consolas"/>
               </a:rPr>
               <a:t>
-public class GetOrder
+</a:t>
+            </a:r>
+            <a:r>
+              <a:rPr lang="en-US" sz="1400">
+                <a:solidFill>
+                  <a:srgbClr val="0000FF"/>
+                </a:solidFill>
+                <a:latin typeface="Consolas"/>
+                <a:cs typeface="Consolas"/>
+              </a:rPr>
+              <a:t>public</a:t>
+            </a:r>
+            <a:r>
+              <a:rPr lang="en-US" sz="1400">
+                <a:solidFill>
+                  <a:srgbClr val="1F1F1F"/>
+                </a:solidFill>
+                <a:latin typeface="Consolas"/>
+                <a:cs typeface="Consolas"/>
+              </a:rPr>
+              <a:t> </a:t>
+            </a:r>
+            <a:r>
+              <a:rPr lang="en-US" sz="1400">
+                <a:solidFill>
+                  <a:srgbClr val="0000FF"/>
+                </a:solidFill>
+                <a:latin typeface="Consolas"/>
+                <a:cs typeface="Consolas"/>
+              </a:rPr>
+              <a:t>class</a:t>
+            </a:r>
+            <a:r>
+              <a:rPr lang="en-US" sz="1400">
+                <a:solidFill>
+                  <a:srgbClr val="1F1F1F"/>
+                </a:solidFill>
+                <a:latin typeface="Consolas"/>
+                <a:cs typeface="Consolas"/>
+              </a:rPr>
+              <a:t> </a:t>
+            </a:r>
+            <a:r>
+              <a:rPr lang="en-US" sz="1400">
+                <a:solidFill>
+                  <a:srgbClr val="2B91AF"/>
+                </a:solidFill>
+                <a:latin typeface="Consolas"/>
+                <a:cs typeface="Consolas"/>
+              </a:rPr>
+              <a:t>GetOrder</a:t>
+            </a:r>
+            <a:r>
+              <a:rPr lang="en-US" sz="1400">
+                <a:solidFill>
+                  <a:srgbClr val="1F1F1F"/>
+                </a:solidFill>
+                <a:latin typeface="Consolas"/>
+                <a:cs typeface="Consolas"/>
+              </a:rPr>
+              <a:t>
 {
-    [Function("GetOrder")]
-    public Task Run(...) { ... }
+    [</a:t>
+            </a:r>
+            <a:r>
+              <a:rPr lang="en-US" sz="1400">
+                <a:solidFill>
+                  <a:srgbClr val="2B91AF"/>
+                </a:solidFill>
+                <a:latin typeface="Consolas"/>
+                <a:cs typeface="Consolas"/>
+              </a:rPr>
+              <a:t>Function</a:t>
+            </a:r>
+            <a:r>
+              <a:rPr lang="en-US" sz="1400">
+                <a:solidFill>
+                  <a:srgbClr val="1F1F1F"/>
+                </a:solidFill>
+                <a:latin typeface="Consolas"/>
+                <a:cs typeface="Consolas"/>
+              </a:rPr>
+              <a:t>(</a:t>
+            </a:r>
+            <a:r>
+              <a:rPr lang="en-US" sz="1400">
+                <a:solidFill>
+                  <a:srgbClr val="A31515"/>
+                </a:solidFill>
+                <a:latin typeface="Consolas"/>
+                <a:cs typeface="Consolas"/>
+              </a:rPr>
+              <a:t>"GetOrder"</a:t>
+            </a:r>
+            <a:r>
+              <a:rPr lang="en-US" sz="1400">
+                <a:solidFill>
+                  <a:srgbClr val="1F1F1F"/>
+                </a:solidFill>
+                <a:latin typeface="Consolas"/>
+                <a:cs typeface="Consolas"/>
+              </a:rPr>
+              <a:t>)]
+    </a:t>
+            </a:r>
+            <a:r>
+              <a:rPr lang="en-US" sz="1400">
+                <a:solidFill>
+                  <a:srgbClr val="0000FF"/>
+                </a:solidFill>
+                <a:latin typeface="Consolas"/>
+                <a:cs typeface="Consolas"/>
+              </a:rPr>
+              <a:t>public</a:t>
+            </a:r>
+            <a:r>
+              <a:rPr lang="en-US" sz="1400">
+                <a:solidFill>
+                  <a:srgbClr val="1F1F1F"/>
+                </a:solidFill>
+                <a:latin typeface="Consolas"/>
+                <a:cs typeface="Consolas"/>
+              </a:rPr>
+              <a:t> </a:t>
+            </a:r>
+            <a:r>
+              <a:rPr lang="en-US" sz="1400">
+                <a:solidFill>
+                  <a:srgbClr val="2B91AF"/>
+                </a:solidFill>
+                <a:latin typeface="Consolas"/>
+                <a:cs typeface="Consolas"/>
+              </a:rPr>
+              <a:t>Task</a:t>
+            </a:r>
+            <a:r>
+              <a:rPr lang="en-US" sz="1400">
+                <a:solidFill>
+                  <a:srgbClr val="1F1F1F"/>
+                </a:solidFill>
+                <a:latin typeface="Consolas"/>
+                <a:cs typeface="Consolas"/>
+              </a:rPr>
+              <a:t> </a:t>
+            </a:r>
+            <a:r>
+              <a:rPr lang="en-US" sz="1400">
+                <a:solidFill>
+                  <a:srgbClr val="74531F"/>
+                </a:solidFill>
+                <a:latin typeface="Consolas"/>
+                <a:cs typeface="Consolas"/>
+              </a:rPr>
+              <a:t>Run</a:t>
+            </a:r>
+            <a:r>
+              <a:rPr lang="en-US" sz="1400">
+                <a:solidFill>
+                  <a:srgbClr val="1F1F1F"/>
+                </a:solidFill>
+                <a:latin typeface="Consolas"/>
+                <a:cs typeface="Consolas"/>
+              </a:rPr>
+              <a:t>(...) { ... }
 }</a:t>
             </a:r>
+            <a:endParaRPr lang="en-US" sz="1400">
+              <a:solidFill>
+                <a:srgbClr val="1F3A5F"/>
+              </a:solidFill>
+              <a:latin typeface="Consolas"/>
+              <a:cs typeface="Consolas"/>
+            </a:endParaRPr>
           </a:p>
         </p:txBody>
       </p:sp>
@@ -12252,8 +16604,55 @@
                 <a:cs typeface="Consolas"/>
               </a:rPr>
               <a:t>
-if (x) return;</a:t>
-            </a:r>
+</a:t>
+            </a:r>
+            <a:r>
+              <a:rPr lang="en-US" sz="1400">
+                <a:solidFill>
+                  <a:srgbClr val="8F08C4"/>
+                </a:solidFill>
+                <a:latin typeface="Consolas"/>
+                <a:cs typeface="Consolas"/>
+              </a:rPr>
+              <a:t>if</a:t>
+            </a:r>
+            <a:r>
+              <a:rPr lang="en-US" sz="1400">
+                <a:solidFill>
+                  <a:srgbClr val="1F1F1F"/>
+                </a:solidFill>
+                <a:latin typeface="Consolas"/>
+                <a:cs typeface="Consolas"/>
+              </a:rPr>
+              <a:t> (x) </a:t>
+            </a:r>
+            <a:r>
+              <a:rPr lang="en-US" sz="1400">
+                <a:solidFill>
+                  <a:srgbClr val="8F08C4"/>
+                </a:solidFill>
+                <a:latin typeface="Consolas"/>
+                <a:cs typeface="Consolas"/>
+              </a:rPr>
+              <a:t>return</a:t>
+            </a:r>
+            <a:r>
+              <a:rPr lang="en-US" sz="1400">
+                <a:solidFill>
+                  <a:srgbClr val="1F1F1F"/>
+                </a:solidFill>
+                <a:latin typeface="Consolas"/>
+                <a:cs typeface="Consolas"/>
+              </a:rPr>
+              <a:t>;</a:t>
+            </a:r>
+            <a:endParaRPr lang="en-US" sz="1400">
+              <a:solidFill>
+                <a:srgbClr val="1F3A5F"/>
+              </a:solidFill>
+              <a:latin typeface="Consolas"/>
+              <a:cs typeface="Consolas"/>
+            </a:endParaRPr>
           </a:p>
         </p:txBody>
       </p:sp>
@@ -12351,8 +16750,55 @@
                 <a:cs typeface="Consolas"/>
               </a:rPr>
               <a:t>
-if (x) { return; }</a:t>
-            </a:r>
+</a:t>
+            </a:r>
+            <a:r>
+              <a:rPr lang="en-US" sz="1400">
+                <a:solidFill>
+                  <a:srgbClr val="8F08C4"/>
+                </a:solidFill>
+                <a:latin typeface="Consolas"/>
+                <a:cs typeface="Consolas"/>
+              </a:rPr>
+              <a:t>if</a:t>
+            </a:r>
+            <a:r>
+              <a:rPr lang="en-US" sz="1400">
+                <a:solidFill>
+                  <a:srgbClr val="1F1F1F"/>
+                </a:solidFill>
+                <a:latin typeface="Consolas"/>
+                <a:cs typeface="Consolas"/>
+              </a:rPr>
+              <a:t> (x) { </a:t>
+            </a:r>
+            <a:r>
+              <a:rPr lang="en-US" sz="1400">
+                <a:solidFill>
+                  <a:srgbClr val="8F08C4"/>
+                </a:solidFill>
+                <a:latin typeface="Consolas"/>
+                <a:cs typeface="Consolas"/>
+              </a:rPr>
+              <a:t>return</a:t>
+            </a:r>
+            <a:r>
+              <a:rPr lang="en-US" sz="1400">
+                <a:solidFill>
+                  <a:srgbClr val="1F1F1F"/>
+                </a:solidFill>
+                <a:latin typeface="Consolas"/>
+                <a:cs typeface="Consolas"/>
+              </a:rPr>
+              <a:t>; }</a:t>
+            </a:r>
+            <a:endParaRPr lang="en-US" sz="1400">
+              <a:solidFill>
+                <a:srgbClr val="1F3A5F"/>
+              </a:solidFill>
+              <a:latin typeface="Consolas"/>
+              <a:cs typeface="Consolas"/>
+            </a:endParaRPr>
           </a:p>
         </p:txBody>
       </p:sp>
@@ -12617,10 +17063,247 @@
                 <a:cs typeface="Consolas"/>
               </a:rPr>
               <a:t>
-void Ship([Id("Order")] Guid orderId) { }
-[Id("Customer")] Guid customerId = Guid.NewGuid();
-Ship(customerId);  // Customer ID passed as Order ID</a:t>
-            </a:r>
+</a:t>
+            </a:r>
+            <a:r>
+              <a:rPr lang="en-US" sz="1400">
+                <a:solidFill>
+                  <a:srgbClr val="0000FF"/>
+                </a:solidFill>
+                <a:latin typeface="Consolas"/>
+                <a:cs typeface="Consolas"/>
+              </a:rPr>
+              <a:t>void</a:t>
+            </a:r>
+            <a:r>
+              <a:rPr lang="en-US" sz="1400">
+                <a:solidFill>
+                  <a:srgbClr val="1F1F1F"/>
+                </a:solidFill>
+                <a:latin typeface="Consolas"/>
+                <a:cs typeface="Consolas"/>
+              </a:rPr>
+              <a:t> </a:t>
+            </a:r>
+            <a:r>
+              <a:rPr lang="en-US" sz="1400">
+                <a:solidFill>
+                  <a:srgbClr val="74531F"/>
+                </a:solidFill>
+                <a:latin typeface="Consolas"/>
+                <a:cs typeface="Consolas"/>
+              </a:rPr>
+              <a:t>Ship</a:t>
+            </a:r>
+            <a:r>
+              <a:rPr lang="en-US" sz="1400">
+                <a:solidFill>
+                  <a:srgbClr val="1F1F1F"/>
+                </a:solidFill>
+                <a:latin typeface="Consolas"/>
+                <a:cs typeface="Consolas"/>
+              </a:rPr>
+              <a:t>([</a:t>
+            </a:r>
+            <a:r>
+              <a:rPr lang="en-US" sz="1400">
+                <a:solidFill>
+                  <a:srgbClr val="2B91AF"/>
+                </a:solidFill>
+                <a:latin typeface="Consolas"/>
+                <a:cs typeface="Consolas"/>
+              </a:rPr>
+              <a:t>Id</a:t>
+            </a:r>
+            <a:r>
+              <a:rPr lang="en-US" sz="1400">
+                <a:solidFill>
+                  <a:srgbClr val="1F1F1F"/>
+                </a:solidFill>
+                <a:latin typeface="Consolas"/>
+                <a:cs typeface="Consolas"/>
+              </a:rPr>
+              <a:t>(</a:t>
+            </a:r>
+            <a:r>
+              <a:rPr lang="en-US" sz="1400">
+                <a:solidFill>
+                  <a:srgbClr val="A31515"/>
+                </a:solidFill>
+                <a:latin typeface="Consolas"/>
+                <a:cs typeface="Consolas"/>
+              </a:rPr>
+              <a:t>"Order"</a:t>
+            </a:r>
+            <a:r>
+              <a:rPr lang="en-US" sz="1400">
+                <a:solidFill>
+                  <a:srgbClr val="1F1F1F"/>
+                </a:solidFill>
+                <a:latin typeface="Consolas"/>
+                <a:cs typeface="Consolas"/>
+              </a:rPr>
+              <a:t>)] </a:t>
+            </a:r>
+            <a:r>
+              <a:rPr lang="en-US" sz="1400">
+                <a:solidFill>
+                  <a:srgbClr val="2B91AF"/>
+                </a:solidFill>
+                <a:latin typeface="Consolas"/>
+                <a:cs typeface="Consolas"/>
+              </a:rPr>
+              <a:t>Guid</a:t>
+            </a:r>
+            <a:r>
+              <a:rPr lang="en-US" sz="1400">
+                <a:solidFill>
+                  <a:srgbClr val="1F1F1F"/>
+                </a:solidFill>
+                <a:latin typeface="Consolas"/>
+                <a:cs typeface="Consolas"/>
+              </a:rPr>
+              <a:t> orderId) { }
+[</a:t>
+            </a:r>
+            <a:r>
+              <a:rPr lang="en-US" sz="1400">
+                <a:solidFill>
+                  <a:srgbClr val="2B91AF"/>
+                </a:solidFill>
+                <a:latin typeface="Consolas"/>
+                <a:cs typeface="Consolas"/>
+              </a:rPr>
+              <a:t>Id</a:t>
+            </a:r>
+            <a:r>
+              <a:rPr lang="en-US" sz="1400">
+                <a:solidFill>
+                  <a:srgbClr val="1F1F1F"/>
+                </a:solidFill>
+                <a:latin typeface="Consolas"/>
+                <a:cs typeface="Consolas"/>
+              </a:rPr>
+              <a:t>(</a:t>
+            </a:r>
+            <a:r>
+              <a:rPr lang="en-US" sz="1400">
+                <a:solidFill>
+                  <a:srgbClr val="A31515"/>
+                </a:solidFill>
+                <a:latin typeface="Consolas"/>
+                <a:cs typeface="Consolas"/>
+              </a:rPr>
+              <a:t>"Customer"</a:t>
+            </a:r>
+            <a:r>
+              <a:rPr lang="en-US" sz="1400">
+                <a:solidFill>
+                  <a:srgbClr val="1F1F1F"/>
+                </a:solidFill>
+                <a:latin typeface="Consolas"/>
+                <a:cs typeface="Consolas"/>
+              </a:rPr>
+              <a:t>)] </a:t>
+            </a:r>
+            <a:r>
+              <a:rPr lang="en-US" sz="1400">
+                <a:solidFill>
+                  <a:srgbClr val="2B91AF"/>
+                </a:solidFill>
+                <a:latin typeface="Consolas"/>
+                <a:cs typeface="Consolas"/>
+              </a:rPr>
+              <a:t>Guid</a:t>
+            </a:r>
+            <a:r>
+              <a:rPr lang="en-US" sz="1400">
+                <a:solidFill>
+                  <a:srgbClr val="1F1F1F"/>
+                </a:solidFill>
+                <a:latin typeface="Consolas"/>
+                <a:cs typeface="Consolas"/>
+              </a:rPr>
+              <a:t> customerId = </a:t>
+            </a:r>
+            <a:r>
+              <a:rPr lang="en-US" sz="1400">
+                <a:solidFill>
+                  <a:srgbClr val="2B91AF"/>
+                </a:solidFill>
+                <a:latin typeface="Consolas"/>
+                <a:cs typeface="Consolas"/>
+              </a:rPr>
+              <a:t>Guid</a:t>
+            </a:r>
+            <a:r>
+              <a:rPr lang="en-US" sz="1400">
+                <a:solidFill>
+                  <a:srgbClr val="1F1F1F"/>
+                </a:solidFill>
+                <a:latin typeface="Consolas"/>
+                <a:cs typeface="Consolas"/>
+              </a:rPr>
+              <a:t>.</a:t>
+            </a:r>
+            <a:r>
+              <a:rPr lang="en-US" sz="1400">
+                <a:solidFill>
+                  <a:srgbClr val="74531F"/>
+                </a:solidFill>
+                <a:latin typeface="Consolas"/>
+                <a:cs typeface="Consolas"/>
+              </a:rPr>
+              <a:t>NewGuid</a:t>
+            </a:r>
+            <a:r>
+              <a:rPr lang="en-US" sz="1400">
+                <a:solidFill>
+                  <a:srgbClr val="1F1F1F"/>
+                </a:solidFill>
+                <a:latin typeface="Consolas"/>
+                <a:cs typeface="Consolas"/>
+              </a:rPr>
+              <a:t>();
+</a:t>
+            </a:r>
+            <a:r>
+              <a:rPr lang="en-US" sz="1400">
+                <a:solidFill>
+                  <a:srgbClr val="74531F"/>
+                </a:solidFill>
+                <a:latin typeface="Consolas"/>
+                <a:cs typeface="Consolas"/>
+              </a:rPr>
+              <a:t>Ship</a:t>
+            </a:r>
+            <a:r>
+              <a:rPr lang="en-US" sz="1400">
+                <a:solidFill>
+                  <a:srgbClr val="1F1F1F"/>
+                </a:solidFill>
+                <a:latin typeface="Consolas"/>
+                <a:cs typeface="Consolas"/>
+              </a:rPr>
+              <a:t>(customerId);  </a:t>
+            </a:r>
+            <a:r>
+              <a:rPr lang="en-US" sz="1400">
+                <a:solidFill>
+                  <a:srgbClr val="008000"/>
+                </a:solidFill>
+                <a:latin typeface="Consolas"/>
+                <a:cs typeface="Consolas"/>
+              </a:rPr>
+              <a:t>// Customer ID passed as Order ID</a:t>
+            </a:r>
+            <a:endParaRPr lang="en-US" sz="1400">
+              <a:solidFill>
+                <a:srgbClr val="1F3A5F"/>
+              </a:solidFill>
+              <a:latin typeface="Consolas"/>
+              <a:cs typeface="Consolas"/>
+            </a:endParaRPr>
           </a:p>
         </p:txBody>
       </p:sp>
@@ -12718,9 +17401,146 @@
                 <a:cs typeface="Consolas"/>
               </a:rPr>
               <a:t>
-[Id("Order")] Guid orderId = Guid.NewGuid();
-Ship(orderId);</a:t>
-            </a:r>
+</a:t>
+            </a:r>
+            <a:r>
+              <a:rPr lang="en-US" sz="1400">
+                <a:solidFill>
+                  <a:srgbClr val="1F1F1F"/>
+                </a:solidFill>
+                <a:latin typeface="Consolas"/>
+                <a:cs typeface="Consolas"/>
+              </a:rPr>
+              <a:t>[</a:t>
+            </a:r>
+            <a:r>
+              <a:rPr lang="en-US" sz="1400">
+                <a:solidFill>
+                  <a:srgbClr val="2B91AF"/>
+                </a:solidFill>
+                <a:latin typeface="Consolas"/>
+                <a:cs typeface="Consolas"/>
+              </a:rPr>
+              <a:t>Id</a:t>
+            </a:r>
+            <a:r>
+              <a:rPr lang="en-US" sz="1400">
+                <a:solidFill>
+                  <a:srgbClr val="1F1F1F"/>
+                </a:solidFill>
+                <a:latin typeface="Consolas"/>
+                <a:cs typeface="Consolas"/>
+              </a:rPr>
+              <a:t>(</a:t>
+            </a:r>
+            <a:r>
+              <a:rPr lang="en-US" sz="1400">
+                <a:solidFill>
+                  <a:srgbClr val="A31515"/>
+                </a:solidFill>
+                <a:latin typeface="Consolas"/>
+                <a:cs typeface="Consolas"/>
+              </a:rPr>
+              <a:t>"Order"</a:t>
+            </a:r>
+            <a:r>
+              <a:rPr lang="en-US" sz="1400">
+                <a:solidFill>
+                  <a:srgbClr val="1F1F1F"/>
+                </a:solidFill>
+                <a:latin typeface="Consolas"/>
+                <a:cs typeface="Consolas"/>
+              </a:rPr>
+              <a:t>)] </a:t>
+            </a:r>
+            <a:r>
+              <a:rPr lang="en-US" sz="1400">
+                <a:solidFill>
+                  <a:srgbClr val="2B91AF"/>
+                </a:solidFill>
+                <a:latin typeface="Consolas"/>
+                <a:cs typeface="Consolas"/>
+              </a:rPr>
+              <a:t>Guid</a:t>
+            </a:r>
+            <a:r>
+              <a:rPr lang="en-US" sz="1400">
+                <a:solidFill>
+                  <a:srgbClr val="1F1F1F"/>
+                </a:solidFill>
+                <a:latin typeface="Consolas"/>
+                <a:cs typeface="Consolas"/>
+              </a:rPr>
+              <a:t> orderId = </a:t>
+            </a:r>
+            <a:r>
+              <a:rPr lang="en-US" sz="1400">
+                <a:solidFill>
+                  <a:srgbClr val="2B91AF"/>
+                </a:solidFill>
+                <a:latin typeface="Consolas"/>
+                <a:cs typeface="Consolas"/>
+              </a:rPr>
+              <a:t>Guid</a:t>
+            </a:r>
+            <a:r>
+              <a:rPr lang="en-US" sz="1400">
+                <a:solidFill>
+                  <a:srgbClr val="1F1F1F"/>
+                </a:solidFill>
+                <a:latin typeface="Consolas"/>
+                <a:cs typeface="Consolas"/>
+              </a:rPr>
+              <a:t>.</a:t>
+            </a:r>
+            <a:r>
+              <a:rPr lang="en-US" sz="1400">
+                <a:solidFill>
+                  <a:srgbClr val="74531F"/>
+                </a:solidFill>
+                <a:latin typeface="Consolas"/>
+                <a:cs typeface="Consolas"/>
+              </a:rPr>
+              <a:t>NewGuid</a:t>
+            </a:r>
+            <a:r>
+              <a:rPr lang="en-US" sz="1400">
+                <a:solidFill>
+                  <a:srgbClr val="1F1F1F"/>
+                </a:solidFill>
+                <a:latin typeface="Consolas"/>
+                <a:cs typeface="Consolas"/>
+              </a:rPr>
+              <a:t>();
+</a:t>
+            </a:r>
+            <a:r>
+              <a:rPr lang="en-US" sz="1400">
+                <a:solidFill>
+                  <a:srgbClr val="74531F"/>
+                </a:solidFill>
+                <a:latin typeface="Consolas"/>
+                <a:cs typeface="Consolas"/>
+              </a:rPr>
+              <a:t>Ship</a:t>
+            </a:r>
+            <a:r>
+              <a:rPr lang="en-US" sz="1400">
+                <a:solidFill>
+                  <a:srgbClr val="1F1F1F"/>
+                </a:solidFill>
+                <a:latin typeface="Consolas"/>
+                <a:cs typeface="Consolas"/>
+              </a:rPr>
+              <a:t>(orderId);</a:t>
+            </a:r>
+            <a:endParaRPr lang="en-US" sz="1400">
+              <a:solidFill>
+                <a:srgbClr val="1F3A5F"/>
+              </a:solidFill>
+              <a:latin typeface="Consolas"/>
+              <a:cs typeface="Consolas"/>
+            </a:endParaRPr>
           </a:p>
         </p:txBody>
       </p:sp>
@@ -12985,11 +17805,228 @@
                 <a:cs typeface="Consolas"/>
               </a:rPr>
               <a:t>
-void Match(
-    [StringSyntax(StringSyntaxAttribute.Regex)] string pattern) { }
-[StringSyntax(StringSyntaxAttribute.Json)] string json = "{}";
-Match(json);  // Json passed where Regex expected</a:t>
-            </a:r>
+</a:t>
+            </a:r>
+            <a:r>
+              <a:rPr lang="en-US" sz="1400">
+                <a:solidFill>
+                  <a:srgbClr val="0000FF"/>
+                </a:solidFill>
+                <a:latin typeface="Consolas"/>
+                <a:cs typeface="Consolas"/>
+              </a:rPr>
+              <a:t>void</a:t>
+            </a:r>
+            <a:r>
+              <a:rPr lang="en-US" sz="1400">
+                <a:solidFill>
+                  <a:srgbClr val="1F1F1F"/>
+                </a:solidFill>
+                <a:latin typeface="Consolas"/>
+                <a:cs typeface="Consolas"/>
+              </a:rPr>
+              <a:t> </a:t>
+            </a:r>
+            <a:r>
+              <a:rPr lang="en-US" sz="1400">
+                <a:solidFill>
+                  <a:srgbClr val="74531F"/>
+                </a:solidFill>
+                <a:latin typeface="Consolas"/>
+                <a:cs typeface="Consolas"/>
+              </a:rPr>
+              <a:t>Match</a:t>
+            </a:r>
+            <a:r>
+              <a:rPr lang="en-US" sz="1400">
+                <a:solidFill>
+                  <a:srgbClr val="1F1F1F"/>
+                </a:solidFill>
+                <a:latin typeface="Consolas"/>
+                <a:cs typeface="Consolas"/>
+              </a:rPr>
+              <a:t>(
+    [</a:t>
+            </a:r>
+            <a:r>
+              <a:rPr lang="en-US" sz="1400">
+                <a:solidFill>
+                  <a:srgbClr val="2B91AF"/>
+                </a:solidFill>
+                <a:latin typeface="Consolas"/>
+                <a:cs typeface="Consolas"/>
+              </a:rPr>
+              <a:t>StringSyntax</a:t>
+            </a:r>
+            <a:r>
+              <a:rPr lang="en-US" sz="1400">
+                <a:solidFill>
+                  <a:srgbClr val="1F1F1F"/>
+                </a:solidFill>
+                <a:latin typeface="Consolas"/>
+                <a:cs typeface="Consolas"/>
+              </a:rPr>
+              <a:t>(</a:t>
+            </a:r>
+            <a:r>
+              <a:rPr lang="en-US" sz="1400">
+                <a:solidFill>
+                  <a:srgbClr val="2B91AF"/>
+                </a:solidFill>
+                <a:latin typeface="Consolas"/>
+                <a:cs typeface="Consolas"/>
+              </a:rPr>
+              <a:t>StringSyntaxAttribute</a:t>
+            </a:r>
+            <a:r>
+              <a:rPr lang="en-US" sz="1400">
+                <a:solidFill>
+                  <a:srgbClr val="1F1F1F"/>
+                </a:solidFill>
+                <a:latin typeface="Consolas"/>
+                <a:cs typeface="Consolas"/>
+              </a:rPr>
+              <a:t>.Regex)] </a:t>
+            </a:r>
+            <a:r>
+              <a:rPr lang="en-US" sz="1400">
+                <a:solidFill>
+                  <a:srgbClr val="0000FF"/>
+                </a:solidFill>
+                <a:latin typeface="Consolas"/>
+                <a:cs typeface="Consolas"/>
+              </a:rPr>
+              <a:t>string</a:t>
+            </a:r>
+            <a:r>
+              <a:rPr lang="en-US" sz="1400">
+                <a:solidFill>
+                  <a:srgbClr val="1F1F1F"/>
+                </a:solidFill>
+                <a:latin typeface="Consolas"/>
+                <a:cs typeface="Consolas"/>
+              </a:rPr>
+              <a:t> pattern) { }
+[</a:t>
+            </a:r>
+            <a:r>
+              <a:rPr lang="en-US" sz="1400">
+                <a:solidFill>
+                  <a:srgbClr val="2B91AF"/>
+                </a:solidFill>
+                <a:latin typeface="Consolas"/>
+                <a:cs typeface="Consolas"/>
+              </a:rPr>
+              <a:t>StringSyntax</a:t>
+            </a:r>
+            <a:r>
+              <a:rPr lang="en-US" sz="1400">
+                <a:solidFill>
+                  <a:srgbClr val="1F1F1F"/>
+                </a:solidFill>
+                <a:latin typeface="Consolas"/>
+                <a:cs typeface="Consolas"/>
+              </a:rPr>
+              <a:t>(</a:t>
+            </a:r>
+            <a:r>
+              <a:rPr lang="en-US" sz="1400">
+                <a:solidFill>
+                  <a:srgbClr val="2B91AF"/>
+                </a:solidFill>
+                <a:latin typeface="Consolas"/>
+                <a:cs typeface="Consolas"/>
+              </a:rPr>
+              <a:t>StringSyntaxAttribute</a:t>
+            </a:r>
+            <a:r>
+              <a:rPr lang="en-US" sz="1400">
+                <a:solidFill>
+                  <a:srgbClr val="1F1F1F"/>
+                </a:solidFill>
+                <a:latin typeface="Consolas"/>
+                <a:cs typeface="Consolas"/>
+              </a:rPr>
+              <a:t>.Json)] </a:t>
+            </a:r>
+            <a:r>
+              <a:rPr lang="en-US" sz="1400">
+                <a:solidFill>
+                  <a:srgbClr val="0000FF"/>
+                </a:solidFill>
+                <a:latin typeface="Consolas"/>
+                <a:cs typeface="Consolas"/>
+              </a:rPr>
+              <a:t>string</a:t>
+            </a:r>
+            <a:r>
+              <a:rPr lang="en-US" sz="1400">
+                <a:solidFill>
+                  <a:srgbClr val="1F1F1F"/>
+                </a:solidFill>
+                <a:latin typeface="Consolas"/>
+                <a:cs typeface="Consolas"/>
+              </a:rPr>
+              <a:t> json = </a:t>
+            </a:r>
+            <a:r>
+              <a:rPr lang="en-US" sz="1400">
+                <a:solidFill>
+                  <a:srgbClr val="A31515"/>
+                </a:solidFill>
+                <a:latin typeface="Consolas"/>
+                <a:cs typeface="Consolas"/>
+              </a:rPr>
+              <a:t>"{}"</a:t>
+            </a:r>
+            <a:r>
+              <a:rPr lang="en-US" sz="1400">
+                <a:solidFill>
+                  <a:srgbClr val="1F1F1F"/>
+                </a:solidFill>
+                <a:latin typeface="Consolas"/>
+                <a:cs typeface="Consolas"/>
+              </a:rPr>
+              <a:t>;
+</a:t>
+            </a:r>
+            <a:r>
+              <a:rPr lang="en-US" sz="1400">
+                <a:solidFill>
+                  <a:srgbClr val="74531F"/>
+                </a:solidFill>
+                <a:latin typeface="Consolas"/>
+                <a:cs typeface="Consolas"/>
+              </a:rPr>
+              <a:t>Match</a:t>
+            </a:r>
+            <a:r>
+              <a:rPr lang="en-US" sz="1400">
+                <a:solidFill>
+                  <a:srgbClr val="1F1F1F"/>
+                </a:solidFill>
+                <a:latin typeface="Consolas"/>
+                <a:cs typeface="Consolas"/>
+              </a:rPr>
+              <a:t>(json);  </a:t>
+            </a:r>
+            <a:r>
+              <a:rPr lang="en-US" sz="1400">
+                <a:solidFill>
+                  <a:srgbClr val="008000"/>
+                </a:solidFill>
+                <a:latin typeface="Consolas"/>
+                <a:cs typeface="Consolas"/>
+              </a:rPr>
+              <a:t>// Json passed where Regex expected</a:t>
+            </a:r>
+            <a:endParaRPr lang="en-US" sz="1400">
+              <a:solidFill>
+                <a:srgbClr val="1F3A5F"/>
+              </a:solidFill>
+              <a:latin typeface="Consolas"/>
+              <a:cs typeface="Consolas"/>
+            </a:endParaRPr>
           </a:p>
         </p:txBody>
       </p:sp>
@@ -13087,9 +18124,126 @@
                 <a:cs typeface="Consolas"/>
               </a:rPr>
               <a:t>
-[StringSyntax(StringSyntaxAttribute.Regex)] string pattern = @"^\d+$";
-Match(pattern);</a:t>
-            </a:r>
+</a:t>
+            </a:r>
+            <a:r>
+              <a:rPr lang="en-US" sz="1400">
+                <a:solidFill>
+                  <a:srgbClr val="1F1F1F"/>
+                </a:solidFill>
+                <a:latin typeface="Consolas"/>
+                <a:cs typeface="Consolas"/>
+              </a:rPr>
+              <a:t>[</a:t>
+            </a:r>
+            <a:r>
+              <a:rPr lang="en-US" sz="1400">
+                <a:solidFill>
+                  <a:srgbClr val="2B91AF"/>
+                </a:solidFill>
+                <a:latin typeface="Consolas"/>
+                <a:cs typeface="Consolas"/>
+              </a:rPr>
+              <a:t>StringSyntax</a:t>
+            </a:r>
+            <a:r>
+              <a:rPr lang="en-US" sz="1400">
+                <a:solidFill>
+                  <a:srgbClr val="1F1F1F"/>
+                </a:solidFill>
+                <a:latin typeface="Consolas"/>
+                <a:cs typeface="Consolas"/>
+              </a:rPr>
+              <a:t>(</a:t>
+            </a:r>
+            <a:r>
+              <a:rPr lang="en-US" sz="1400">
+                <a:solidFill>
+                  <a:srgbClr val="2B91AF"/>
+                </a:solidFill>
+                <a:latin typeface="Consolas"/>
+                <a:cs typeface="Consolas"/>
+              </a:rPr>
+              <a:t>StringSyntaxAttribute</a:t>
+            </a:r>
+            <a:r>
+              <a:rPr lang="en-US" sz="1400">
+                <a:solidFill>
+                  <a:srgbClr val="1F1F1F"/>
+                </a:solidFill>
+                <a:latin typeface="Consolas"/>
+                <a:cs typeface="Consolas"/>
+              </a:rPr>
+              <a:t>.Regex)] </a:t>
+            </a:r>
+            <a:r>
+              <a:rPr lang="en-US" sz="1400">
+                <a:solidFill>
+                  <a:srgbClr val="0000FF"/>
+                </a:solidFill>
+                <a:latin typeface="Consolas"/>
+                <a:cs typeface="Consolas"/>
+              </a:rPr>
+              <a:t>string</a:t>
+            </a:r>
+            <a:r>
+              <a:rPr lang="en-US" sz="1400">
+                <a:solidFill>
+                  <a:srgbClr val="1F1F1F"/>
+                </a:solidFill>
+                <a:latin typeface="Consolas"/>
+                <a:cs typeface="Consolas"/>
+              </a:rPr>
+              <a:t> pattern = </a:t>
+            </a:r>
+            <a:r>
+              <a:rPr lang="en-US" sz="1400">
+                <a:solidFill>
+                  <a:srgbClr val="A31515"/>
+                </a:solidFill>
+                <a:latin typeface="Consolas"/>
+                <a:cs typeface="Consolas"/>
+              </a:rPr>
+              <a:t>@"^\d+$"</a:t>
+            </a:r>
+            <a:r>
+              <a:rPr lang="en-US" sz="1400">
+                <a:solidFill>
+                  <a:srgbClr val="1F1F1F"/>
+                </a:solidFill>
+                <a:latin typeface="Consolas"/>
+                <a:cs typeface="Consolas"/>
+              </a:rPr>
+              <a:t>;
+</a:t>
+            </a:r>
+            <a:r>
+              <a:rPr lang="en-US" sz="1400">
+                <a:solidFill>
+                  <a:srgbClr val="74531F"/>
+                </a:solidFill>
+                <a:latin typeface="Consolas"/>
+                <a:cs typeface="Consolas"/>
+              </a:rPr>
+              <a:t>Match</a:t>
+            </a:r>
+            <a:r>
+              <a:rPr lang="en-US" sz="1400">
+                <a:solidFill>
+                  <a:srgbClr val="1F1F1F"/>
+                </a:solidFill>
+                <a:latin typeface="Consolas"/>
+                <a:cs typeface="Consolas"/>
+              </a:rPr>
+              <a:t>(pattern);</a:t>
+            </a:r>
+            <a:endParaRPr lang="en-US" sz="1400">
+              <a:solidFill>
+                <a:srgbClr val="1F3A5F"/>
+              </a:solidFill>
+              <a:latin typeface="Consolas"/>
+              <a:cs typeface="Consolas"/>
+            </a:endParaRPr>
           </a:p>
         </p:txBody>
       </p:sp>
@@ -13354,8 +18508,55 @@
                 <a:cs typeface="Consolas"/>
               </a:rPr>
               <a:t>
-int max = 5;</a:t>
-            </a:r>
+</a:t>
+            </a:r>
+            <a:r>
+              <a:rPr lang="en-US" sz="1400">
+                <a:solidFill>
+                  <a:srgbClr val="0000FF"/>
+                </a:solidFill>
+                <a:latin typeface="Consolas"/>
+                <a:cs typeface="Consolas"/>
+              </a:rPr>
+              <a:t>int</a:t>
+            </a:r>
+            <a:r>
+              <a:rPr lang="en-US" sz="1400">
+                <a:solidFill>
+                  <a:srgbClr val="1F1F1F"/>
+                </a:solidFill>
+                <a:latin typeface="Consolas"/>
+                <a:cs typeface="Consolas"/>
+              </a:rPr>
+              <a:t> max = </a:t>
+            </a:r>
+            <a:r>
+              <a:rPr lang="en-US" sz="1400">
+                <a:solidFill>
+                  <a:srgbClr val="098658"/>
+                </a:solidFill>
+                <a:latin typeface="Consolas"/>
+                <a:cs typeface="Consolas"/>
+              </a:rPr>
+              <a:t>5</a:t>
+            </a:r>
+            <a:r>
+              <a:rPr lang="en-US" sz="1400">
+                <a:solidFill>
+                  <a:srgbClr val="1F1F1F"/>
+                </a:solidFill>
+                <a:latin typeface="Consolas"/>
+                <a:cs typeface="Consolas"/>
+              </a:rPr>
+              <a:t>;</a:t>
+            </a:r>
+            <a:endParaRPr lang="en-US" sz="1400">
+              <a:solidFill>
+                <a:srgbClr val="1F3A5F"/>
+              </a:solidFill>
+              <a:latin typeface="Consolas"/>
+              <a:cs typeface="Consolas"/>
+            </a:endParaRPr>
           </a:p>
         </p:txBody>
       </p:sp>
@@ -13453,8 +18654,75 @@
                 <a:cs typeface="Consolas"/>
               </a:rPr>
               <a:t>
-const int max = 5;</a:t>
-            </a:r>
+</a:t>
+            </a:r>
+            <a:r>
+              <a:rPr lang="en-US" sz="1400">
+                <a:solidFill>
+                  <a:srgbClr val="0000FF"/>
+                </a:solidFill>
+                <a:latin typeface="Consolas"/>
+                <a:cs typeface="Consolas"/>
+              </a:rPr>
+              <a:t>const</a:t>
+            </a:r>
+            <a:r>
+              <a:rPr lang="en-US" sz="1400">
+                <a:solidFill>
+                  <a:srgbClr val="1F1F1F"/>
+                </a:solidFill>
+                <a:latin typeface="Consolas"/>
+                <a:cs typeface="Consolas"/>
+              </a:rPr>
+              <a:t> </a:t>
+            </a:r>
+            <a:r>
+              <a:rPr lang="en-US" sz="1400">
+                <a:solidFill>
+                  <a:srgbClr val="0000FF"/>
+                </a:solidFill>
+                <a:latin typeface="Consolas"/>
+                <a:cs typeface="Consolas"/>
+              </a:rPr>
+              <a:t>int</a:t>
+            </a:r>
+            <a:r>
+              <a:rPr lang="en-US" sz="1400">
+                <a:solidFill>
+                  <a:srgbClr val="1F1F1F"/>
+                </a:solidFill>
+                <a:latin typeface="Consolas"/>
+                <a:cs typeface="Consolas"/>
+              </a:rPr>
+              <a:t> max = </a:t>
+            </a:r>
+            <a:r>
+              <a:rPr lang="en-US" sz="1400">
+                <a:solidFill>
+                  <a:srgbClr val="098658"/>
+                </a:solidFill>
+                <a:latin typeface="Consolas"/>
+                <a:cs typeface="Consolas"/>
+              </a:rPr>
+              <a:t>5</a:t>
+            </a:r>
+            <a:r>
+              <a:rPr lang="en-US" sz="1400">
+                <a:solidFill>
+                  <a:srgbClr val="1F1F1F"/>
+                </a:solidFill>
+                <a:latin typeface="Consolas"/>
+                <a:cs typeface="Consolas"/>
+              </a:rPr>
+              <a:t>;</a:t>
+            </a:r>
+            <a:endParaRPr lang="en-US" sz="1400">
+              <a:solidFill>
+                <a:srgbClr val="1F3A5F"/>
+              </a:solidFill>
+              <a:latin typeface="Consolas"/>
+              <a:cs typeface="Consolas"/>
+            </a:endParaRPr>
           </a:p>
         </p:txBody>
       </p:sp>
@@ -13719,8 +18987,35 @@
                 <a:cs typeface="Consolas"/>
               </a:rPr>
               <a:t>
-if (a == b) { }</a:t>
-            </a:r>
+</a:t>
+            </a:r>
+            <a:r>
+              <a:rPr lang="en-US" sz="1400">
+                <a:solidFill>
+                  <a:srgbClr val="8F08C4"/>
+                </a:solidFill>
+                <a:latin typeface="Consolas"/>
+                <a:cs typeface="Consolas"/>
+              </a:rPr>
+              <a:t>if</a:t>
+            </a:r>
+            <a:r>
+              <a:rPr lang="en-US" sz="1400">
+                <a:solidFill>
+                  <a:srgbClr val="1F1F1F"/>
+                </a:solidFill>
+                <a:latin typeface="Consolas"/>
+                <a:cs typeface="Consolas"/>
+              </a:rPr>
+              <a:t> (a == b) { }</a:t>
+            </a:r>
+            <a:endParaRPr lang="en-US" sz="1400">
+              <a:solidFill>
+                <a:srgbClr val="1F3A5F"/>
+              </a:solidFill>
+              <a:latin typeface="Consolas"/>
+              <a:cs typeface="Consolas"/>
+            </a:endParaRPr>
           </a:p>
         </p:txBody>
       </p:sp>
@@ -13818,8 +19113,95 @@
                 <a:cs typeface="Consolas"/>
               </a:rPr>
               <a:t>
-if (string.Equals(a, b, StringComparison.Ordinal)) { }</a:t>
-            </a:r>
+</a:t>
+            </a:r>
+            <a:r>
+              <a:rPr lang="en-US" sz="1400">
+                <a:solidFill>
+                  <a:srgbClr val="8F08C4"/>
+                </a:solidFill>
+                <a:latin typeface="Consolas"/>
+                <a:cs typeface="Consolas"/>
+              </a:rPr>
+              <a:t>if</a:t>
+            </a:r>
+            <a:r>
+              <a:rPr lang="en-US" sz="1400">
+                <a:solidFill>
+                  <a:srgbClr val="1F1F1F"/>
+                </a:solidFill>
+                <a:latin typeface="Consolas"/>
+                <a:cs typeface="Consolas"/>
+              </a:rPr>
+              <a:t> (</a:t>
+            </a:r>
+            <a:r>
+              <a:rPr lang="en-US" sz="1400">
+                <a:solidFill>
+                  <a:srgbClr val="0000FF"/>
+                </a:solidFill>
+                <a:latin typeface="Consolas"/>
+                <a:cs typeface="Consolas"/>
+              </a:rPr>
+              <a:t>string</a:t>
+            </a:r>
+            <a:r>
+              <a:rPr lang="en-US" sz="1400">
+                <a:solidFill>
+                  <a:srgbClr val="1F1F1F"/>
+                </a:solidFill>
+                <a:latin typeface="Consolas"/>
+                <a:cs typeface="Consolas"/>
+              </a:rPr>
+              <a:t>.</a:t>
+            </a:r>
+            <a:r>
+              <a:rPr lang="en-US" sz="1400">
+                <a:solidFill>
+                  <a:srgbClr val="74531F"/>
+                </a:solidFill>
+                <a:latin typeface="Consolas"/>
+                <a:cs typeface="Consolas"/>
+              </a:rPr>
+              <a:t>Equals</a:t>
+            </a:r>
+            <a:r>
+              <a:rPr lang="en-US" sz="1400">
+                <a:solidFill>
+                  <a:srgbClr val="1F1F1F"/>
+                </a:solidFill>
+                <a:latin typeface="Consolas"/>
+                <a:cs typeface="Consolas"/>
+              </a:rPr>
+              <a:t>(a, b, </a:t>
+            </a:r>
+            <a:r>
+              <a:rPr lang="en-US" sz="1400">
+                <a:solidFill>
+                  <a:srgbClr val="2B91AF"/>
+                </a:solidFill>
+                <a:latin typeface="Consolas"/>
+                <a:cs typeface="Consolas"/>
+              </a:rPr>
+              <a:t>StringComparison</a:t>
+            </a:r>
+            <a:r>
+              <a:rPr lang="en-US" sz="1400">
+                <a:solidFill>
+                  <a:srgbClr val="1F1F1F"/>
+                </a:solidFill>
+                <a:latin typeface="Consolas"/>
+                <a:cs typeface="Consolas"/>
+              </a:rPr>
+              <a:t>.Ordinal)) { }</a:t>
+            </a:r>
+            <a:endParaRPr lang="en-US" sz="1400">
+              <a:solidFill>
+                <a:srgbClr val="1F3A5F"/>
+              </a:solidFill>
+              <a:latin typeface="Consolas"/>
+              <a:cs typeface="Consolas"/>
+            </a:endParaRPr>
           </a:p>
         </p:txBody>
       </p:sp>
@@ -14084,8 +19466,75 @@
                 <a:cs typeface="Consolas"/>
               </a:rPr>
               <a:t>
-try { Save(); } catch { }</a:t>
-            </a:r>
+</a:t>
+            </a:r>
+            <a:r>
+              <a:rPr lang="en-US" sz="1400">
+                <a:solidFill>
+                  <a:srgbClr val="8F08C4"/>
+                </a:solidFill>
+                <a:latin typeface="Consolas"/>
+                <a:cs typeface="Consolas"/>
+              </a:rPr>
+              <a:t>try</a:t>
+            </a:r>
+            <a:r>
+              <a:rPr lang="en-US" sz="1400">
+                <a:solidFill>
+                  <a:srgbClr val="1F1F1F"/>
+                </a:solidFill>
+                <a:latin typeface="Consolas"/>
+                <a:cs typeface="Consolas"/>
+              </a:rPr>
+              <a:t> { </a:t>
+            </a:r>
+            <a:r>
+              <a:rPr lang="en-US" sz="1400">
+                <a:solidFill>
+                  <a:srgbClr val="74531F"/>
+                </a:solidFill>
+                <a:latin typeface="Consolas"/>
+                <a:cs typeface="Consolas"/>
+              </a:rPr>
+              <a:t>Save</a:t>
+            </a:r>
+            <a:r>
+              <a:rPr lang="en-US" sz="1400">
+                <a:solidFill>
+                  <a:srgbClr val="1F1F1F"/>
+                </a:solidFill>
+                <a:latin typeface="Consolas"/>
+                <a:cs typeface="Consolas"/>
+              </a:rPr>
+              <a:t>(); } </a:t>
+            </a:r>
+            <a:r>
+              <a:rPr lang="en-US" sz="1400">
+                <a:solidFill>
+                  <a:srgbClr val="8F08C4"/>
+                </a:solidFill>
+                <a:latin typeface="Consolas"/>
+                <a:cs typeface="Consolas"/>
+              </a:rPr>
+              <a:t>catch</a:t>
+            </a:r>
+            <a:r>
+              <a:rPr lang="en-US" sz="1400">
+                <a:solidFill>
+                  <a:srgbClr val="1F1F1F"/>
+                </a:solidFill>
+                <a:latin typeface="Consolas"/>
+                <a:cs typeface="Consolas"/>
+              </a:rPr>
+              <a:t> { }</a:t>
+            </a:r>
+            <a:endParaRPr lang="en-US" sz="1400">
+              <a:solidFill>
+                <a:srgbClr val="1F3A5F"/>
+              </a:solidFill>
+              <a:latin typeface="Consolas"/>
+              <a:cs typeface="Consolas"/>
+            </a:endParaRPr>
           </a:p>
         </p:txBody>
       </p:sp>
@@ -14183,13 +19632,160 @@
                 <a:cs typeface="Consolas"/>
               </a:rPr>
               <a:t>
-try { Save(); }
-catch (Exception e)
+</a:t>
+            </a:r>
+            <a:r>
+              <a:rPr lang="en-US" sz="1400">
+                <a:solidFill>
+                  <a:srgbClr val="8F08C4"/>
+                </a:solidFill>
+                <a:latin typeface="Consolas"/>
+                <a:cs typeface="Consolas"/>
+              </a:rPr>
+              <a:t>try</a:t>
+            </a:r>
+            <a:r>
+              <a:rPr lang="en-US" sz="1400">
+                <a:solidFill>
+                  <a:srgbClr val="1F1F1F"/>
+                </a:solidFill>
+                <a:latin typeface="Consolas"/>
+                <a:cs typeface="Consolas"/>
+              </a:rPr>
+              <a:t> { </a:t>
+            </a:r>
+            <a:r>
+              <a:rPr lang="en-US" sz="1400">
+                <a:solidFill>
+                  <a:srgbClr val="74531F"/>
+                </a:solidFill>
+                <a:latin typeface="Consolas"/>
+                <a:cs typeface="Consolas"/>
+              </a:rPr>
+              <a:t>Save</a:t>
+            </a:r>
+            <a:r>
+              <a:rPr lang="en-US" sz="1400">
+                <a:solidFill>
+                  <a:srgbClr val="1F1F1F"/>
+                </a:solidFill>
+                <a:latin typeface="Consolas"/>
+                <a:cs typeface="Consolas"/>
+              </a:rPr>
+              <a:t>(); }
+</a:t>
+            </a:r>
+            <a:r>
+              <a:rPr lang="en-US" sz="1400">
+                <a:solidFill>
+                  <a:srgbClr val="8F08C4"/>
+                </a:solidFill>
+                <a:latin typeface="Consolas"/>
+                <a:cs typeface="Consolas"/>
+              </a:rPr>
+              <a:t>catch</a:t>
+            </a:r>
+            <a:r>
+              <a:rPr lang="en-US" sz="1400">
+                <a:solidFill>
+                  <a:srgbClr val="1F1F1F"/>
+                </a:solidFill>
+                <a:latin typeface="Consolas"/>
+                <a:cs typeface="Consolas"/>
+              </a:rPr>
+              <a:t> (</a:t>
+            </a:r>
+            <a:r>
+              <a:rPr lang="en-US" sz="1400">
+                <a:solidFill>
+                  <a:srgbClr val="2B91AF"/>
+                </a:solidFill>
+                <a:latin typeface="Consolas"/>
+                <a:cs typeface="Consolas"/>
+              </a:rPr>
+              <a:t>Exception</a:t>
+            </a:r>
+            <a:r>
+              <a:rPr lang="en-US" sz="1400">
+                <a:solidFill>
+                  <a:srgbClr val="1F1F1F"/>
+                </a:solidFill>
+                <a:latin typeface="Consolas"/>
+                <a:cs typeface="Consolas"/>
+              </a:rPr>
+              <a:t> e)
 {
-    logger.LogError(e, "Save failed");
-    throw;
+    logger.</a:t>
+            </a:r>
+            <a:r>
+              <a:rPr lang="en-US" sz="1400">
+                <a:solidFill>
+                  <a:srgbClr val="74531F"/>
+                </a:solidFill>
+                <a:latin typeface="Consolas"/>
+                <a:cs typeface="Consolas"/>
+              </a:rPr>
+              <a:t>LogError</a:t>
+            </a:r>
+            <a:r>
+              <a:rPr lang="en-US" sz="1400">
+                <a:solidFill>
+                  <a:srgbClr val="1F1F1F"/>
+                </a:solidFill>
+                <a:latin typeface="Consolas"/>
+                <a:cs typeface="Consolas"/>
+              </a:rPr>
+              <a:t>(e, </a:t>
+            </a:r>
+            <a:r>
+              <a:rPr lang="en-US" sz="1400">
+                <a:solidFill>
+                  <a:srgbClr val="A31515"/>
+                </a:solidFill>
+                <a:latin typeface="Consolas"/>
+                <a:cs typeface="Consolas"/>
+              </a:rPr>
+              <a:t>"Save failed"</a:t>
+            </a:r>
+            <a:r>
+              <a:rPr lang="en-US" sz="1400">
+                <a:solidFill>
+                  <a:srgbClr val="1F1F1F"/>
+                </a:solidFill>
+                <a:latin typeface="Consolas"/>
+                <a:cs typeface="Consolas"/>
+              </a:rPr>
+              <a:t>);
+    </a:t>
+            </a:r>
+            <a:r>
+              <a:rPr lang="en-US" sz="1400">
+                <a:solidFill>
+                  <a:srgbClr val="8F08C4"/>
+                </a:solidFill>
+                <a:latin typeface="Consolas"/>
+                <a:cs typeface="Consolas"/>
+              </a:rPr>
+              <a:t>throw</a:t>
+            </a:r>
+            <a:r>
+              <a:rPr lang="en-US" sz="1400">
+                <a:solidFill>
+                  <a:srgbClr val="1F1F1F"/>
+                </a:solidFill>
+                <a:latin typeface="Consolas"/>
+                <a:cs typeface="Consolas"/>
+              </a:rPr>
+              <a:t>;
 }</a:t>
             </a:r>
+            <a:endParaRPr lang="en-US" sz="1400">
+              <a:solidFill>
+                <a:srgbClr val="1F3A5F"/>
+              </a:solidFill>
+              <a:latin typeface="Consolas"/>
+              <a:cs typeface="Consolas"/>
+            </a:endParaRPr>
           </a:p>
         </p:txBody>
       </p:sp>
